--- a/system-design-101/vi/lessons/sd-14-018/slides/sd-14-018.pptx
+++ b/system-design-101/vi/lessons/sd-14-018/slides/sd-14-018.pptx
@@ -3252,93 +3252,18 @@
       </p:sp>
       <p:sp>
         <p:nvSpPr>
-          <p:cNvPr id="3" name="Text 1"/>
-          <p:cNvSpPr/>
-          <p:nvPr/>
-        </p:nvSpPr>
-        <p:spPr>
-          <a:xfrm>
-            <a:off x="914400" y="1333500"/>
-            <a:ext cx="16459200" cy="1047750"/>
-          </a:xfrm>
-          <a:prstGeom prst="rect">
-            <a:avLst/>
-          </a:prstGeom>
-          <a:noFill/>
-          <a:ln/>
-        </p:spPr>
-        <p:txBody>
-          <a:bodyPr wrap="square" lIns="0" tIns="64008" rIns="0" bIns="-64008" rtlCol="0" anchor="t"/>
-          <a:lstStyle/>
-          <a:p>
-            <a:pPr algn="l" indent="0" marL="0">
-              <a:lnSpc>
-                <a:spcPts val="7488"/>
-              </a:lnSpc>
-              <a:buNone/>
-            </a:pPr>
-            <a:r>
-              <a:rPr lang="en-US" sz="7200" dirty="0" spc="-55" kern="0">
-                <a:solidFill>
-                  <a:srgbClr val="F3EEE3"/>
-                </a:solidFill>
-                <a:latin typeface="Bricolage Grotesque ExtraBold" pitchFamily="34" charset="0"/>
-                <a:ea typeface="Bricolage Grotesque ExtraBold" pitchFamily="34" charset="-122"/>
-                <a:cs typeface="Bricolage Grotesque ExtraBold" pitchFamily="34" charset="-120"/>
-              </a:rPr>
-              <a:t>Từ</a:t>
-            </a:r>
-            <a:r>
-              <a:rPr lang="en-US" sz="7200" dirty="0" spc="-11" kern="0">
-                <a:solidFill>
-                  <a:srgbClr val="F3EEE3"/>
-                </a:solidFill>
-                <a:latin typeface="Bricolage Grotesque ExtraBold" pitchFamily="34" charset="0"/>
-                <a:ea typeface="Bricolage Grotesque ExtraBold" pitchFamily="34" charset="-122"/>
-                <a:cs typeface="Bricolage Grotesque ExtraBold" pitchFamily="34" charset="-120"/>
-              </a:rPr>
-              <a:t> khóa</a:t>
-            </a:r>
-            <a:r>
-              <a:rPr lang="en-US" sz="7200" dirty="0" spc="0" kern="0">
-                <a:solidFill>
-                  <a:srgbClr val="F3EEE3"/>
-                </a:solidFill>
-                <a:latin typeface="Bricolage Grotesque ExtraBold" pitchFamily="34" charset="0"/>
-                <a:ea typeface="Bricolage Grotesque ExtraBold" pitchFamily="34" charset="-122"/>
-                <a:cs typeface="Bricolage Grotesque ExtraBold" pitchFamily="34" charset="-120"/>
-              </a:rPr>
-              <a:t> cần</a:t>
-            </a:r>
-            <a:r>
-              <a:rPr lang="en-US" sz="7200" dirty="0" spc="-3" kern="0">
-                <a:solidFill>
-                  <a:srgbClr val="F3EEE3"/>
-                </a:solidFill>
-                <a:latin typeface="Bricolage Grotesque ExtraBold" pitchFamily="34" charset="0"/>
-                <a:ea typeface="Bricolage Grotesque ExtraBold" pitchFamily="34" charset="-122"/>
-                <a:cs typeface="Bricolage Grotesque ExtraBold" pitchFamily="34" charset="-120"/>
-              </a:rPr>
-              <a:t> nhớ</a:t>
-            </a:r>
-            <a:endParaRPr lang="en-US" sz="7200" dirty="0"/>
-          </a:p>
-        </p:txBody>
-      </p:sp>
-      <p:sp>
-        <p:nvSpPr>
-          <p:cNvPr id="4" name="Shape 2"/>
-          <p:cNvSpPr/>
-          <p:nvPr/>
-        </p:nvSpPr>
-        <p:spPr>
-          <a:xfrm>
-            <a:off x="914400" y="2552700"/>
-            <a:ext cx="3943350" cy="2286000"/>
+          <p:cNvPr id="3" name="Shape 1"/>
+          <p:cNvSpPr/>
+          <p:nvPr/>
+        </p:nvSpPr>
+        <p:spPr>
+          <a:xfrm>
+            <a:off x="914400" y="1447800"/>
+            <a:ext cx="4000500" cy="1962150"/>
           </a:xfrm>
           <a:prstGeom prst="roundRect">
             <a:avLst>
-              <a:gd name="adj" fmla="val 10000"/>
+              <a:gd name="adj" fmla="val 10680"/>
             </a:avLst>
           </a:prstGeom>
           <a:solidFill>
@@ -3349,14 +3274,14 @@
       </p:sp>
       <p:sp>
         <p:nvSpPr>
-          <p:cNvPr id="5" name="Text 3"/>
-          <p:cNvSpPr/>
-          <p:nvPr/>
-        </p:nvSpPr>
-        <p:spPr>
-          <a:xfrm>
-            <a:off x="1181100" y="2743200"/>
-            <a:ext cx="3409950" cy="647700"/>
+          <p:cNvPr id="4" name="Text 2"/>
+          <p:cNvSpPr/>
+          <p:nvPr/>
+        </p:nvSpPr>
+        <p:spPr>
+          <a:xfrm>
+            <a:off x="1143000" y="1600200"/>
+            <a:ext cx="3543300" cy="438150"/>
           </a:xfrm>
           <a:prstGeom prst="rect">
             <a:avLst/>
@@ -3372,7 +3297,7 @@
               <a:buNone/>
             </a:pPr>
             <a:r>
-              <a:rPr lang="en-US" sz="4200" dirty="0" spc="-8" kern="0">
+              <a:rPr lang="en-US" sz="2550" dirty="0" spc="-2" kern="0">
                 <a:solidFill>
                   <a:srgbClr val="7C93FF"/>
                 </a:solidFill>
@@ -3382,20 +3307,20 @@
               </a:rPr>
               <a:t>AES</a:t>
             </a:r>
-            <a:endParaRPr lang="en-US" sz="4200" dirty="0"/>
+            <a:endParaRPr lang="en-US" sz="2550" dirty="0"/>
           </a:p>
         </p:txBody>
       </p:sp>
       <p:sp>
         <p:nvSpPr>
-          <p:cNvPr id="6" name="Text 4"/>
-          <p:cNvSpPr/>
-          <p:nvPr/>
-        </p:nvSpPr>
-        <p:spPr>
-          <a:xfrm>
-            <a:off x="1181100" y="3429000"/>
-            <a:ext cx="3409950" cy="571500"/>
+          <p:cNvPr id="5" name="Text 3"/>
+          <p:cNvSpPr/>
+          <p:nvPr/>
+        </p:nvSpPr>
+        <p:spPr>
+          <a:xfrm>
+            <a:off x="1143000" y="2057400"/>
+            <a:ext cx="3543300" cy="571500"/>
           </a:xfrm>
           <a:prstGeom prst="rect">
             <a:avLst/>
@@ -3452,194 +3377,14 @@
       </p:sp>
       <p:sp>
         <p:nvSpPr>
-          <p:cNvPr id="7" name="Text 5"/>
-          <p:cNvSpPr/>
-          <p:nvPr/>
-        </p:nvSpPr>
-        <p:spPr>
-          <a:xfrm>
-            <a:off x="1181100" y="4038600"/>
-            <a:ext cx="3409950" cy="666750"/>
-          </a:xfrm>
-          <a:prstGeom prst="rect">
-            <a:avLst/>
-          </a:prstGeom>
-          <a:noFill/>
-          <a:ln/>
-        </p:spPr>
-        <p:txBody>
-          <a:bodyPr wrap="square" lIns="0" tIns="9716" rIns="0" bIns="-9716" rtlCol="0" anchor="t"/>
-          <a:lstStyle/>
-          <a:p>
-            <a:pPr algn="l" indent="0" marL="0">
-              <a:lnSpc>
-                <a:spcPts val="2340"/>
-              </a:lnSpc>
-              <a:buNone/>
-            </a:pPr>
-            <a:r>
-              <a:rPr lang="en-US" sz="1800" dirty="0" spc="-2" kern="0">
-                <a:solidFill>
-                  <a:srgbClr val="D8D3C4"/>
-                </a:solidFill>
-                <a:latin typeface="Be Vietnam Pro" pitchFamily="34" charset="0"/>
-                <a:ea typeface="Be Vietnam Pro" pitchFamily="34" charset="-122"/>
-                <a:cs typeface="Be Vietnam Pro" pitchFamily="34" charset="-120"/>
-              </a:rPr>
-              <a:t>mã</a:t>
-            </a:r>
-            <a:r>
-              <a:rPr lang="en-US" sz="1800" dirty="0" spc="-1" kern="0">
-                <a:solidFill>
-                  <a:srgbClr val="D8D3C4"/>
-                </a:solidFill>
-                <a:latin typeface="Be Vietnam Pro" pitchFamily="34" charset="0"/>
-                <a:ea typeface="Be Vietnam Pro" pitchFamily="34" charset="-122"/>
-                <a:cs typeface="Be Vietnam Pro" pitchFamily="34" charset="-120"/>
-              </a:rPr>
-              <a:t> hóa</a:t>
-            </a:r>
-            <a:r>
-              <a:rPr lang="en-US" sz="1800" dirty="0" spc="10" kern="0">
-                <a:solidFill>
-                  <a:srgbClr val="D8D3C4"/>
-                </a:solidFill>
-                <a:latin typeface="Be Vietnam Pro" pitchFamily="34" charset="0"/>
-                <a:ea typeface="Be Vietnam Pro" pitchFamily="34" charset="-122"/>
-                <a:cs typeface="Be Vietnam Pro" pitchFamily="34" charset="-120"/>
-              </a:rPr>
-              <a:t> đối</a:t>
-            </a:r>
-            <a:r>
-              <a:rPr lang="en-US" sz="1800" dirty="0" spc="11" kern="0">
-                <a:solidFill>
-                  <a:srgbClr val="D8D3C4"/>
-                </a:solidFill>
-                <a:latin typeface="Be Vietnam Pro" pitchFamily="34" charset="0"/>
-                <a:ea typeface="Be Vietnam Pro" pitchFamily="34" charset="-122"/>
-                <a:cs typeface="Be Vietnam Pro" pitchFamily="34" charset="-120"/>
-              </a:rPr>
-              <a:t> xứng,</a:t>
-            </a:r>
-            <a:r>
-              <a:rPr lang="en-US" sz="1800" dirty="0" spc="-7" kern="0">
-                <a:solidFill>
-                  <a:srgbClr val="D8D3C4"/>
-                </a:solidFill>
-                <a:latin typeface="Be Vietnam Pro" pitchFamily="34" charset="0"/>
-                <a:ea typeface="Be Vietnam Pro" pitchFamily="34" charset="-122"/>
-                <a:cs typeface="Be Vietnam Pro" pitchFamily="34" charset="-120"/>
-              </a:rPr>
-              <a:t> một</a:t>
-            </a:r>
-            <a:r>
-              <a:rPr lang="en-US" sz="1800" dirty="0" spc="-1" kern="0">
-                <a:solidFill>
-                  <a:srgbClr val="D8D3C4"/>
-                </a:solidFill>
-                <a:latin typeface="Be Vietnam Pro" pitchFamily="34" charset="0"/>
-                <a:ea typeface="Be Vietnam Pro" pitchFamily="34" charset="-122"/>
-                <a:cs typeface="Be Vietnam Pro" pitchFamily="34" charset="-120"/>
-              </a:rPr>
-              <a:t> khóa</a:t>
-            </a:r>
-            <a:r>
-              <a:rPr lang="en-US" sz="1800" dirty="0" spc="2" kern="0">
-                <a:solidFill>
-                  <a:srgbClr val="D8D3C4"/>
-                </a:solidFill>
-                <a:latin typeface="Be Vietnam Pro" pitchFamily="34" charset="0"/>
-                <a:ea typeface="Be Vietnam Pro" pitchFamily="34" charset="-122"/>
-                <a:cs typeface="Be Vietnam Pro" pitchFamily="34" charset="-120"/>
-              </a:rPr>
-              <a:t> cho cả hai</a:t>
-            </a:r>
-            <a:r>
-              <a:rPr lang="en-US" sz="1800" dirty="0" spc="-1" kern="0">
-                <a:solidFill>
-                  <a:srgbClr val="D8D3C4"/>
-                </a:solidFill>
-                <a:latin typeface="Be Vietnam Pro" pitchFamily="34" charset="0"/>
-                <a:ea typeface="Be Vietnam Pro" pitchFamily="34" charset="-122"/>
-                <a:cs typeface="Be Vietnam Pro" pitchFamily="34" charset="-120"/>
-              </a:rPr>
-              <a:t> chiều</a:t>
-            </a:r>
-            <a:endParaRPr lang="en-US" sz="1800" dirty="0"/>
-          </a:p>
-        </p:txBody>
-      </p:sp>
-      <p:sp>
-        <p:nvSpPr>
-          <p:cNvPr id="8" name="Shape 6"/>
-          <p:cNvSpPr/>
-          <p:nvPr/>
-        </p:nvSpPr>
-        <p:spPr>
-          <a:xfrm>
-            <a:off x="5086350" y="2552700"/>
-            <a:ext cx="3943350" cy="2286000"/>
-          </a:xfrm>
-          <a:prstGeom prst="roundRect">
-            <a:avLst>
-              <a:gd name="adj" fmla="val 10000"/>
-            </a:avLst>
-          </a:prstGeom>
-          <a:solidFill>
-            <a:srgbClr val="1E212B"/>
-          </a:solidFill>
-          <a:ln/>
-        </p:spPr>
-      </p:sp>
-      <p:sp>
-        <p:nvSpPr>
-          <p:cNvPr id="9" name="Text 7"/>
-          <p:cNvSpPr/>
-          <p:nvPr/>
-        </p:nvSpPr>
-        <p:spPr>
-          <a:xfrm>
-            <a:off x="5353050" y="2743200"/>
-            <a:ext cx="3409950" cy="647700"/>
-          </a:xfrm>
-          <a:prstGeom prst="rect">
-            <a:avLst/>
-          </a:prstGeom>
-          <a:noFill/>
-          <a:ln/>
-        </p:spPr>
-        <p:txBody>
-          <a:bodyPr wrap="square" lIns="0" tIns="0" rIns="0" bIns="0" rtlCol="0" anchor="t"/>
-          <a:lstStyle/>
-          <a:p>
-            <a:pPr algn="l" indent="0" marL="0">
-              <a:buNone/>
-            </a:pPr>
-            <a:r>
-              <a:rPr lang="en-US" sz="4200" dirty="0" spc="1" kern="0">
-                <a:solidFill>
-                  <a:srgbClr val="7C93FF"/>
-                </a:solidFill>
-                <a:latin typeface="Bricolage Grotesque ExtraBold" pitchFamily="34" charset="0"/>
-                <a:ea typeface="Bricolage Grotesque ExtraBold" pitchFamily="34" charset="-122"/>
-                <a:cs typeface="Bricolage Grotesque ExtraBold" pitchFamily="34" charset="-120"/>
-              </a:rPr>
-              <a:t>GCM</a:t>
-            </a:r>
-            <a:endParaRPr lang="en-US" sz="4200" dirty="0"/>
-          </a:p>
-        </p:txBody>
-      </p:sp>
-      <p:sp>
-        <p:nvSpPr>
-          <p:cNvPr id="10" name="Text 8"/>
-          <p:cNvSpPr/>
-          <p:nvPr/>
-        </p:nvSpPr>
-        <p:spPr>
-          <a:xfrm>
-            <a:off x="5353050" y="3429000"/>
-            <a:ext cx="3409950" cy="571500"/>
+          <p:cNvPr id="6" name="Text 4"/>
+          <p:cNvSpPr/>
+          <p:nvPr/>
+        </p:nvSpPr>
+        <p:spPr>
+          <a:xfrm>
+            <a:off x="1143000" y="2667000"/>
+            <a:ext cx="3543300" cy="609600"/>
           </a:xfrm>
           <a:prstGeom prst="rect">
             <a:avLst/>
@@ -3658,26 +3403,48 @@
               <a:buNone/>
             </a:pPr>
             <a:r>
-              <a:rPr lang="en-US" sz="1650" dirty="0" spc="-5" kern="0">
-                <a:solidFill>
-                  <a:srgbClr val="9A98A0"/>
-                </a:solidFill>
-                <a:latin typeface="Be Vietnam Pro" pitchFamily="34" charset="0"/>
-                <a:ea typeface="Be Vietnam Pro" pitchFamily="34" charset="-122"/>
-                <a:cs typeface="Be Vietnam Pro" pitchFamily="34" charset="-120"/>
-              </a:rPr>
-              <a:t>Galois/Counter</a:t>
-            </a:r>
-            <a:r>
-              <a:rPr lang="en-US" sz="1650" dirty="0" spc="-3" kern="0">
-                <a:solidFill>
-                  <a:srgbClr val="9A98A0"/>
-                </a:solidFill>
-                <a:latin typeface="Be Vietnam Pro" pitchFamily="34" charset="0"/>
-                <a:ea typeface="Be Vietnam Pro" pitchFamily="34" charset="-122"/>
-                <a:cs typeface="Be Vietnam Pro" pitchFamily="34" charset="-120"/>
-              </a:rPr>
-              <a:t> Mode</a:t>
+              <a:rPr lang="en-US" sz="1650" dirty="0" spc="0" kern="0">
+                <a:solidFill>
+                  <a:srgbClr val="D8D3C4"/>
+                </a:solidFill>
+                <a:latin typeface="Be Vietnam Pro" pitchFamily="34" charset="0"/>
+                <a:ea typeface="Be Vietnam Pro" pitchFamily="34" charset="-122"/>
+                <a:cs typeface="Be Vietnam Pro" pitchFamily="34" charset="-120"/>
+              </a:rPr>
+              <a:t>mã</a:t>
+            </a:r>
+            <a:r>
+              <a:rPr lang="en-US" sz="1650" dirty="0" spc="-1" kern="0">
+                <a:solidFill>
+                  <a:srgbClr val="D8D3C4"/>
+                </a:solidFill>
+                <a:latin typeface="Be Vietnam Pro" pitchFamily="34" charset="0"/>
+                <a:ea typeface="Be Vietnam Pro" pitchFamily="34" charset="-122"/>
+                <a:cs typeface="Be Vietnam Pro" pitchFamily="34" charset="-120"/>
+              </a:rPr>
+              <a:t> hóa</a:t>
+            </a:r>
+            <a:r>
+              <a:rPr lang="en-US" sz="1650" dirty="0" spc="10" kern="0">
+                <a:solidFill>
+                  <a:srgbClr val="D8D3C4"/>
+                </a:solidFill>
+                <a:latin typeface="Be Vietnam Pro" pitchFamily="34" charset="0"/>
+                <a:ea typeface="Be Vietnam Pro" pitchFamily="34" charset="-122"/>
+                <a:cs typeface="Be Vietnam Pro" pitchFamily="34" charset="-120"/>
+              </a:rPr>
+              <a:t> đối xứng,</a:t>
+            </a:r>
+            <a:r>
+              <a:rPr lang="en-US" sz="1650" dirty="0" spc="-1" kern="0">
+                <a:solidFill>
+                  <a:srgbClr val="D8D3C4"/>
+                </a:solidFill>
+                <a:latin typeface="Be Vietnam Pro" pitchFamily="34" charset="0"/>
+                <a:ea typeface="Be Vietnam Pro" pitchFamily="34" charset="-122"/>
+                <a:cs typeface="Be Vietnam Pro" pitchFamily="34" charset="-120"/>
+              </a:rPr>
+              <a:t> một khóa chung</a:t>
             </a:r>
             <a:endParaRPr lang="en-US" sz="1650" dirty="0"/>
           </a:p>
@@ -3685,148 +3452,18 @@
       </p:sp>
       <p:sp>
         <p:nvSpPr>
-          <p:cNvPr id="11" name="Text 9"/>
-          <p:cNvSpPr/>
-          <p:nvPr/>
-        </p:nvSpPr>
-        <p:spPr>
-          <a:xfrm>
-            <a:off x="5353050" y="4038600"/>
-            <a:ext cx="3409950" cy="666750"/>
-          </a:xfrm>
-          <a:prstGeom prst="rect">
-            <a:avLst/>
-          </a:prstGeom>
-          <a:noFill/>
-          <a:ln/>
-        </p:spPr>
-        <p:txBody>
-          <a:bodyPr wrap="square" lIns="0" tIns="9716" rIns="0" bIns="-9716" rtlCol="0" anchor="t"/>
-          <a:lstStyle/>
-          <a:p>
-            <a:pPr algn="l" indent="0" marL="0">
-              <a:lnSpc>
-                <a:spcPts val="2340"/>
-              </a:lnSpc>
-              <a:buNone/>
-            </a:pPr>
-            <a:r>
-              <a:rPr lang="en-US" sz="1800" dirty="0" spc="0" kern="0">
-                <a:solidFill>
-                  <a:srgbClr val="D8D3C4"/>
-                </a:solidFill>
-                <a:latin typeface="Be Vietnam Pro" pitchFamily="34" charset="0"/>
-                <a:ea typeface="Be Vietnam Pro" pitchFamily="34" charset="-122"/>
-                <a:cs typeface="Be Vietnam Pro" pitchFamily="34" charset="-120"/>
-              </a:rPr>
-              <a:t>chế</a:t>
-            </a:r>
-            <a:r>
-              <a:rPr lang="en-US" sz="1800" dirty="0" spc="13" kern="0">
-                <a:solidFill>
-                  <a:srgbClr val="D8D3C4"/>
-                </a:solidFill>
-                <a:latin typeface="Be Vietnam Pro" pitchFamily="34" charset="0"/>
-                <a:ea typeface="Be Vietnam Pro" pitchFamily="34" charset="-122"/>
-                <a:cs typeface="Be Vietnam Pro" pitchFamily="34" charset="-120"/>
-              </a:rPr>
-              <a:t> độ</a:t>
-            </a:r>
-            <a:r>
-              <a:rPr lang="en-US" sz="1800" dirty="0" spc="9" kern="0">
-                <a:solidFill>
-                  <a:srgbClr val="D8D3C4"/>
-                </a:solidFill>
-                <a:latin typeface="Be Vietnam Pro" pitchFamily="34" charset="0"/>
-                <a:ea typeface="Be Vietnam Pro" pitchFamily="34" charset="-122"/>
-                <a:cs typeface="Be Vietnam Pro" pitchFamily="34" charset="-120"/>
-              </a:rPr>
-              <a:t> vừa</a:t>
-            </a:r>
-            <a:r>
-              <a:rPr lang="en-US" sz="1800" dirty="0" spc="-1" kern="0">
-                <a:solidFill>
-                  <a:srgbClr val="D8D3C4"/>
-                </a:solidFill>
-                <a:latin typeface="Be Vietnam Pro" pitchFamily="34" charset="0"/>
-                <a:ea typeface="Be Vietnam Pro" pitchFamily="34" charset="-122"/>
-                <a:cs typeface="Be Vietnam Pro" pitchFamily="34" charset="-120"/>
-              </a:rPr>
-              <a:t> mã hóa</a:t>
-            </a:r>
-            <a:r>
-              <a:rPr lang="en-US" sz="1800" dirty="0" spc="8" kern="0">
-                <a:solidFill>
-                  <a:srgbClr val="D8D3C4"/>
-                </a:solidFill>
-                <a:latin typeface="Be Vietnam Pro" pitchFamily="34" charset="0"/>
-                <a:ea typeface="Be Vietnam Pro" pitchFamily="34" charset="-122"/>
-                <a:cs typeface="Be Vietnam Pro" pitchFamily="34" charset="-120"/>
-              </a:rPr>
-              <a:t> vừa</a:t>
-            </a:r>
-            <a:r>
-              <a:rPr lang="en-US" sz="1800" dirty="0" spc="-11" kern="0">
-                <a:solidFill>
-                  <a:srgbClr val="D8D3C4"/>
-                </a:solidFill>
-                <a:latin typeface="Be Vietnam Pro" pitchFamily="34" charset="0"/>
-                <a:ea typeface="Be Vietnam Pro" pitchFamily="34" charset="-122"/>
-                <a:cs typeface="Be Vietnam Pro" pitchFamily="34" charset="-120"/>
-              </a:rPr>
-              <a:t> gắn</a:t>
-            </a:r>
-            <a:r>
-              <a:rPr lang="en-US" sz="1800" dirty="0" spc="-2" kern="0">
-                <a:solidFill>
-                  <a:srgbClr val="D8D3C4"/>
-                </a:solidFill>
-                <a:latin typeface="Be Vietnam Pro" pitchFamily="34" charset="0"/>
-                <a:ea typeface="Be Vietnam Pro" pitchFamily="34" charset="-122"/>
-                <a:cs typeface="Be Vietnam Pro" pitchFamily="34" charset="-120"/>
-              </a:rPr>
-              <a:t> thẻ</a:t>
-            </a:r>
-            <a:r>
-              <a:rPr lang="en-US" sz="1800" dirty="0" spc="-10" kern="0">
-                <a:solidFill>
-                  <a:srgbClr val="D8D3C4"/>
-                </a:solidFill>
-                <a:latin typeface="Be Vietnam Pro" pitchFamily="34" charset="0"/>
-                <a:ea typeface="Be Vietnam Pro" pitchFamily="34" charset="-122"/>
-                <a:cs typeface="Be Vietnam Pro" pitchFamily="34" charset="-120"/>
-              </a:rPr>
-              <a:t> xác</a:t>
-            </a:r>
-            <a:r>
-              <a:rPr lang="en-US" sz="1800" dirty="0" spc="5" kern="0">
-                <a:solidFill>
-                  <a:srgbClr val="D8D3C4"/>
-                </a:solidFill>
-                <a:latin typeface="Be Vietnam Pro" pitchFamily="34" charset="0"/>
-                <a:ea typeface="Be Vietnam Pro" pitchFamily="34" charset="-122"/>
-                <a:cs typeface="Be Vietnam Pro" pitchFamily="34" charset="-120"/>
-              </a:rPr>
-              <a:t> thực</a:t>
-            </a:r>
-            <a:endParaRPr lang="en-US" sz="1800" dirty="0"/>
-          </a:p>
-        </p:txBody>
-      </p:sp>
-      <p:sp>
-        <p:nvSpPr>
-          <p:cNvPr id="12" name="Shape 10"/>
-          <p:cNvSpPr/>
-          <p:nvPr/>
-        </p:nvSpPr>
-        <p:spPr>
-          <a:xfrm>
-            <a:off x="9258300" y="2552700"/>
-            <a:ext cx="3943350" cy="2286000"/>
+          <p:cNvPr id="7" name="Shape 5"/>
+          <p:cNvSpPr/>
+          <p:nvPr/>
+        </p:nvSpPr>
+        <p:spPr>
+          <a:xfrm>
+            <a:off x="5067300" y="1447800"/>
+            <a:ext cx="4000500" cy="1962150"/>
           </a:xfrm>
           <a:prstGeom prst="roundRect">
             <a:avLst>
-              <a:gd name="adj" fmla="val 10000"/>
+              <a:gd name="adj" fmla="val 10680"/>
             </a:avLst>
           </a:prstGeom>
           <a:solidFill>
@@ -3837,14 +3474,14 @@
       </p:sp>
       <p:sp>
         <p:nvSpPr>
-          <p:cNvPr id="13" name="Text 11"/>
-          <p:cNvSpPr/>
-          <p:nvPr/>
-        </p:nvSpPr>
-        <p:spPr>
-          <a:xfrm>
-            <a:off x="9525000" y="2743200"/>
-            <a:ext cx="3409950" cy="647700"/>
+          <p:cNvPr id="8" name="Text 6"/>
+          <p:cNvSpPr/>
+          <p:nvPr/>
+        </p:nvSpPr>
+        <p:spPr>
+          <a:xfrm>
+            <a:off x="5295900" y="1600200"/>
+            <a:ext cx="3543300" cy="438150"/>
           </a:xfrm>
           <a:prstGeom prst="rect">
             <a:avLst/>
@@ -3860,30 +3497,30 @@
               <a:buNone/>
             </a:pPr>
             <a:r>
-              <a:rPr lang="en-US" sz="4200" dirty="0" spc="-30" kern="0">
-                <a:solidFill>
-                  <a:srgbClr val="FFB454"/>
+              <a:rPr lang="en-US" sz="2550" dirty="0" spc="-1" kern="0">
+                <a:solidFill>
+                  <a:srgbClr val="7C93FF"/>
                 </a:solidFill>
                 <a:latin typeface="Bricolage Grotesque ExtraBold" pitchFamily="34" charset="0"/>
                 <a:ea typeface="Bricolage Grotesque ExtraBold" pitchFamily="34" charset="-122"/>
                 <a:cs typeface="Bricolage Grotesque ExtraBold" pitchFamily="34" charset="-120"/>
               </a:rPr>
-              <a:t>RSA</a:t>
-            </a:r>
-            <a:endParaRPr lang="en-US" sz="4200" dirty="0"/>
+              <a:t>GCM</a:t>
+            </a:r>
+            <a:endParaRPr lang="en-US" sz="2550" dirty="0"/>
           </a:p>
         </p:txBody>
       </p:sp>
       <p:sp>
         <p:nvSpPr>
-          <p:cNvPr id="14" name="Text 12"/>
-          <p:cNvSpPr/>
-          <p:nvPr/>
-        </p:nvSpPr>
-        <p:spPr>
-          <a:xfrm>
-            <a:off x="9525000" y="3429000"/>
-            <a:ext cx="3409950" cy="571500"/>
+          <p:cNvPr id="9" name="Text 7"/>
+          <p:cNvSpPr/>
+          <p:nvPr/>
+        </p:nvSpPr>
+        <p:spPr>
+          <a:xfrm>
+            <a:off x="5295900" y="2057400"/>
+            <a:ext cx="3543300" cy="571500"/>
           </a:xfrm>
           <a:prstGeom prst="rect">
             <a:avLst/>
@@ -3902,7 +3539,7 @@
               <a:buNone/>
             </a:pPr>
             <a:r>
-              <a:rPr lang="en-US" sz="1650" dirty="0" spc="-4" kern="0">
+              <a:rPr lang="en-US" sz="1650" dirty="0" spc="-5" kern="0">
                 <a:solidFill>
                   <a:srgbClr val="9A98A0"/>
                 </a:solidFill>
@@ -3910,7 +3547,18 @@
                 <a:ea typeface="Be Vietnam Pro" pitchFamily="34" charset="-122"/>
                 <a:cs typeface="Be Vietnam Pro" pitchFamily="34" charset="-120"/>
               </a:rPr>
-              <a:t>Rivest-Shamir-Adleman</a:t>
+              <a:t>Galois/Counter</a:t>
+            </a:r>
+            <a:r>
+              <a:rPr lang="en-US" sz="1650" dirty="0" spc="-3" kern="0">
+                <a:solidFill>
+                  <a:srgbClr val="9A98A0"/>
+                </a:solidFill>
+                <a:latin typeface="Be Vietnam Pro" pitchFamily="34" charset="0"/>
+                <a:ea typeface="Be Vietnam Pro" pitchFamily="34" charset="-122"/>
+                <a:cs typeface="Be Vietnam Pro" pitchFamily="34" charset="-120"/>
+              </a:rPr>
+              <a:t> Mode</a:t>
             </a:r>
             <a:endParaRPr lang="en-US" sz="1650" dirty="0"/>
           </a:p>
@@ -3918,150 +3566,14 @@
       </p:sp>
       <p:sp>
         <p:nvSpPr>
-          <p:cNvPr id="15" name="Text 13"/>
-          <p:cNvSpPr/>
-          <p:nvPr/>
-        </p:nvSpPr>
-        <p:spPr>
-          <a:xfrm>
-            <a:off x="9525000" y="4038600"/>
-            <a:ext cx="3409950" cy="666750"/>
-          </a:xfrm>
-          <a:prstGeom prst="rect">
-            <a:avLst/>
-          </a:prstGeom>
-          <a:noFill/>
-          <a:ln/>
-        </p:spPr>
-        <p:txBody>
-          <a:bodyPr wrap="square" lIns="0" tIns="9716" rIns="0" bIns="-9716" rtlCol="0" anchor="t"/>
-          <a:lstStyle/>
-          <a:p>
-            <a:pPr algn="l" indent="0" marL="0">
-              <a:lnSpc>
-                <a:spcPts val="2340"/>
-              </a:lnSpc>
-              <a:buNone/>
-            </a:pPr>
-            <a:r>
-              <a:rPr lang="en-US" sz="1800" dirty="0" spc="-10" kern="0">
-                <a:solidFill>
-                  <a:srgbClr val="D8D3C4"/>
-                </a:solidFill>
-                <a:latin typeface="Be Vietnam Pro" pitchFamily="34" charset="0"/>
-                <a:ea typeface="Be Vietnam Pro" pitchFamily="34" charset="-122"/>
-                <a:cs typeface="Be Vietnam Pro" pitchFamily="34" charset="-120"/>
-              </a:rPr>
-              <a:t>thuật toán</a:t>
-            </a:r>
-            <a:r>
-              <a:rPr lang="en-US" sz="1800" dirty="0" spc="-1" kern="0">
-                <a:solidFill>
-                  <a:srgbClr val="D8D3C4"/>
-                </a:solidFill>
-                <a:latin typeface="Be Vietnam Pro" pitchFamily="34" charset="0"/>
-                <a:ea typeface="Be Vietnam Pro" pitchFamily="34" charset="-122"/>
-                <a:cs typeface="Be Vietnam Pro" pitchFamily="34" charset="-120"/>
-              </a:rPr>
-              <a:t> mã hóa khóa</a:t>
-            </a:r>
-            <a:r>
-              <a:rPr lang="en-US" sz="1800" dirty="0" spc="-2" kern="0">
-                <a:solidFill>
-                  <a:srgbClr val="D8D3C4"/>
-                </a:solidFill>
-                <a:latin typeface="Be Vietnam Pro" pitchFamily="34" charset="0"/>
-                <a:ea typeface="Be Vietnam Pro" pitchFamily="34" charset="-122"/>
-                <a:cs typeface="Be Vietnam Pro" pitchFamily="34" charset="-120"/>
-              </a:rPr>
-              <a:t> công</a:t>
-            </a:r>
-            <a:r>
-              <a:rPr lang="en-US" sz="1800" dirty="0" spc="2" kern="0">
-                <a:solidFill>
-                  <a:srgbClr val="D8D3C4"/>
-                </a:solidFill>
-                <a:latin typeface="Be Vietnam Pro" pitchFamily="34" charset="0"/>
-                <a:ea typeface="Be Vietnam Pro" pitchFamily="34" charset="-122"/>
-                <a:cs typeface="Be Vietnam Pro" pitchFamily="34" charset="-120"/>
-              </a:rPr>
-              <a:t> khai</a:t>
-            </a:r>
-            <a:endParaRPr lang="en-US" sz="1800" dirty="0"/>
-          </a:p>
-        </p:txBody>
-      </p:sp>
-      <p:sp>
-        <p:nvSpPr>
-          <p:cNvPr id="16" name="Shape 14"/>
-          <p:cNvSpPr/>
-          <p:nvPr/>
-        </p:nvSpPr>
-        <p:spPr>
-          <a:xfrm>
-            <a:off x="13430250" y="2552700"/>
-            <a:ext cx="3943350" cy="2286000"/>
-          </a:xfrm>
-          <a:prstGeom prst="roundRect">
-            <a:avLst>
-              <a:gd name="adj" fmla="val 10000"/>
-            </a:avLst>
-          </a:prstGeom>
-          <a:solidFill>
-            <a:srgbClr val="1E212B"/>
-          </a:solidFill>
-          <a:ln/>
-        </p:spPr>
-      </p:sp>
-      <p:sp>
-        <p:nvSpPr>
-          <p:cNvPr id="17" name="Text 15"/>
-          <p:cNvSpPr/>
-          <p:nvPr/>
-        </p:nvSpPr>
-        <p:spPr>
-          <a:xfrm>
-            <a:off x="13696950" y="2743200"/>
-            <a:ext cx="3409950" cy="647700"/>
-          </a:xfrm>
-          <a:prstGeom prst="rect">
-            <a:avLst/>
-          </a:prstGeom>
-          <a:noFill/>
-          <a:ln/>
-        </p:spPr>
-        <p:txBody>
-          <a:bodyPr wrap="square" lIns="0" tIns="0" rIns="0" bIns="0" rtlCol="0" anchor="t"/>
-          <a:lstStyle/>
-          <a:p>
-            <a:pPr algn="l" indent="0" marL="0">
-              <a:buNone/>
-            </a:pPr>
-            <a:r>
-              <a:rPr lang="en-US" sz="4200" dirty="0" spc="-38" kern="0">
-                <a:solidFill>
-                  <a:srgbClr val="FFB454"/>
-                </a:solidFill>
-                <a:latin typeface="Bricolage Grotesque ExtraBold" pitchFamily="34" charset="0"/>
-                <a:ea typeface="Bricolage Grotesque ExtraBold" pitchFamily="34" charset="-122"/>
-                <a:cs typeface="Bricolage Grotesque ExtraBold" pitchFamily="34" charset="-120"/>
-              </a:rPr>
-              <a:t>OAEP</a:t>
-            </a:r>
-            <a:endParaRPr lang="en-US" sz="4200" dirty="0"/>
-          </a:p>
-        </p:txBody>
-      </p:sp>
-      <p:sp>
-        <p:nvSpPr>
-          <p:cNvPr id="18" name="Text 16"/>
-          <p:cNvSpPr/>
-          <p:nvPr/>
-        </p:nvSpPr>
-        <p:spPr>
-          <a:xfrm>
-            <a:off x="13696950" y="3429000"/>
-            <a:ext cx="3409950" cy="571500"/>
+          <p:cNvPr id="10" name="Text 8"/>
+          <p:cNvSpPr/>
+          <p:nvPr/>
+        </p:nvSpPr>
+        <p:spPr>
+          <a:xfrm>
+            <a:off x="5295900" y="2667000"/>
+            <a:ext cx="3543300" cy="609600"/>
           </a:xfrm>
           <a:prstGeom prst="rect">
             <a:avLst/>
@@ -4080,48 +3592,114 @@
               <a:buNone/>
             </a:pPr>
             <a:r>
-              <a:rPr lang="en-US" sz="1650" dirty="0" spc="-3" kern="0">
-                <a:solidFill>
-                  <a:srgbClr val="9A98A0"/>
-                </a:solidFill>
-                <a:latin typeface="Be Vietnam Pro" pitchFamily="34" charset="0"/>
-                <a:ea typeface="Be Vietnam Pro" pitchFamily="34" charset="-122"/>
-                <a:cs typeface="Be Vietnam Pro" pitchFamily="34" charset="-120"/>
-              </a:rPr>
-              <a:t>Optimal</a:t>
-            </a:r>
-            <a:r>
-              <a:rPr lang="en-US" sz="1650" dirty="0" spc="-1" kern="0">
-                <a:solidFill>
-                  <a:srgbClr val="9A98A0"/>
-                </a:solidFill>
-                <a:latin typeface="Be Vietnam Pro" pitchFamily="34" charset="0"/>
-                <a:ea typeface="Be Vietnam Pro" pitchFamily="34" charset="-122"/>
-                <a:cs typeface="Be Vietnam Pro" pitchFamily="34" charset="-120"/>
-              </a:rPr>
-              <a:t> Asymmetric</a:t>
+              <a:rPr lang="en-US" sz="1650" dirty="0" spc="1" kern="0">
+                <a:solidFill>
+                  <a:srgbClr val="D8D3C4"/>
+                </a:solidFill>
+                <a:latin typeface="Be Vietnam Pro" pitchFamily="34" charset="0"/>
+                <a:ea typeface="Be Vietnam Pro" pitchFamily="34" charset="-122"/>
+                <a:cs typeface="Be Vietnam Pro" pitchFamily="34" charset="-120"/>
+              </a:rPr>
+              <a:t>chế</a:t>
+            </a:r>
+            <a:r>
+              <a:rPr lang="en-US" sz="1650" dirty="0" spc="14" kern="0">
+                <a:solidFill>
+                  <a:srgbClr val="D8D3C4"/>
+                </a:solidFill>
+                <a:latin typeface="Be Vietnam Pro" pitchFamily="34" charset="0"/>
+                <a:ea typeface="Be Vietnam Pro" pitchFamily="34" charset="-122"/>
+                <a:cs typeface="Be Vietnam Pro" pitchFamily="34" charset="-120"/>
+              </a:rPr>
+              <a:t> độ</a:t>
+            </a:r>
+            <a:r>
+              <a:rPr lang="en-US" sz="1650" dirty="0" spc="7" kern="0">
+                <a:solidFill>
+                  <a:srgbClr val="D8D3C4"/>
+                </a:solidFill>
+                <a:latin typeface="Be Vietnam Pro" pitchFamily="34" charset="0"/>
+                <a:ea typeface="Be Vietnam Pro" pitchFamily="34" charset="-122"/>
+                <a:cs typeface="Be Vietnam Pro" pitchFamily="34" charset="-120"/>
+              </a:rPr>
+              <a:t> vừa</a:t>
+            </a:r>
+            <a:r>
+              <a:rPr lang="en-US" sz="1650" dirty="0" spc="2" kern="0">
+                <a:solidFill>
+                  <a:srgbClr val="D8D3C4"/>
+                </a:solidFill>
+                <a:latin typeface="Be Vietnam Pro" pitchFamily="34" charset="0"/>
+                <a:ea typeface="Be Vietnam Pro" pitchFamily="34" charset="-122"/>
+                <a:cs typeface="Be Vietnam Pro" pitchFamily="34" charset="-120"/>
+              </a:rPr>
+              <a:t> mã</a:t>
             </a:r>
             <a:r>
               <a:rPr lang="en-US" sz="1650" dirty="0" spc="-2" kern="0">
                 <a:solidFill>
-                  <a:srgbClr val="9A98A0"/>
-                </a:solidFill>
-                <a:latin typeface="Be Vietnam Pro" pitchFamily="34" charset="0"/>
-                <a:ea typeface="Be Vietnam Pro" pitchFamily="34" charset="-122"/>
-                <a:cs typeface="Be Vietnam Pro" pitchFamily="34" charset="-120"/>
-              </a:rPr>
-              <a:t> Encryption</a:t>
-            </a:r>
-            <a:r>
-              <a:rPr lang="en-US" sz="1650" dirty="0" spc="-5" kern="0">
-                <a:solidFill>
-                  <a:srgbClr val="9A98A0"/>
-                </a:solidFill>
-                <a:latin typeface="Be Vietnam Pro" pitchFamily="34" charset="0"/>
-                <a:ea typeface="Be Vietnam Pro" pitchFamily="34" charset="-122"/>
-                <a:cs typeface="Be Vietnam Pro" pitchFamily="34" charset="-120"/>
-              </a:rPr>
-              <a:t> Padding</a:t>
+                  <a:srgbClr val="D8D3C4"/>
+                </a:solidFill>
+                <a:latin typeface="Be Vietnam Pro" pitchFamily="34" charset="0"/>
+                <a:ea typeface="Be Vietnam Pro" pitchFamily="34" charset="-122"/>
+                <a:cs typeface="Be Vietnam Pro" pitchFamily="34" charset="-120"/>
+              </a:rPr>
+              <a:t> hóa</a:t>
+            </a:r>
+            <a:r>
+              <a:rPr lang="en-US" sz="1650" dirty="0" spc="7" kern="0">
+                <a:solidFill>
+                  <a:srgbClr val="D8D3C4"/>
+                </a:solidFill>
+                <a:latin typeface="Be Vietnam Pro" pitchFamily="34" charset="0"/>
+                <a:ea typeface="Be Vietnam Pro" pitchFamily="34" charset="-122"/>
+                <a:cs typeface="Be Vietnam Pro" pitchFamily="34" charset="-120"/>
+              </a:rPr>
+              <a:t> vừa</a:t>
+            </a:r>
+            <a:r>
+              <a:rPr lang="en-US" sz="1650" dirty="0" spc="-8" kern="0">
+                <a:solidFill>
+                  <a:srgbClr val="D8D3C4"/>
+                </a:solidFill>
+                <a:latin typeface="Be Vietnam Pro" pitchFamily="34" charset="0"/>
+                <a:ea typeface="Be Vietnam Pro" pitchFamily="34" charset="-122"/>
+                <a:cs typeface="Be Vietnam Pro" pitchFamily="34" charset="-120"/>
+              </a:rPr>
+              <a:t> gắn</a:t>
+            </a:r>
+            <a:r>
+              <a:rPr lang="en-US" sz="1650" dirty="0" spc="4" kern="0">
+                <a:solidFill>
+                  <a:srgbClr val="D8D3C4"/>
+                </a:solidFill>
+                <a:latin typeface="Be Vietnam Pro" pitchFamily="34" charset="0"/>
+                <a:ea typeface="Be Vietnam Pro" pitchFamily="34" charset="-122"/>
+                <a:cs typeface="Be Vietnam Pro" pitchFamily="34" charset="-120"/>
+              </a:rPr>
+              <a:t> thẻ</a:t>
+            </a:r>
+            <a:r>
+              <a:rPr lang="en-US" sz="1650" dirty="0" spc="-12" kern="0">
+                <a:solidFill>
+                  <a:srgbClr val="D8D3C4"/>
+                </a:solidFill>
+                <a:latin typeface="Be Vietnam Pro" pitchFamily="34" charset="0"/>
+                <a:ea typeface="Be Vietnam Pro" pitchFamily="34" charset="-122"/>
+                <a:cs typeface="Be Vietnam Pro" pitchFamily="34" charset="-120"/>
+              </a:rPr>
+              <a:t> xác</a:t>
+            </a:r>
+            <a:r>
+              <a:rPr lang="en-US" sz="1650" dirty="0" spc="7" kern="0">
+                <a:solidFill>
+                  <a:srgbClr val="D8D3C4"/>
+                </a:solidFill>
+                <a:latin typeface="Be Vietnam Pro" pitchFamily="34" charset="0"/>
+                <a:ea typeface="Be Vietnam Pro" pitchFamily="34" charset="-122"/>
+                <a:cs typeface="Be Vietnam Pro" pitchFamily="34" charset="-120"/>
+              </a:rPr>
+              <a:t> thực</a:t>
             </a:r>
             <a:endParaRPr lang="en-US" sz="1650" dirty="0"/>
           </a:p>
@@ -4129,148 +3707,18 @@
       </p:sp>
       <p:sp>
         <p:nvSpPr>
-          <p:cNvPr id="19" name="Text 17"/>
-          <p:cNvSpPr/>
-          <p:nvPr/>
-        </p:nvSpPr>
-        <p:spPr>
-          <a:xfrm>
-            <a:off x="13696950" y="4038600"/>
-            <a:ext cx="3409950" cy="666750"/>
-          </a:xfrm>
-          <a:prstGeom prst="rect">
-            <a:avLst/>
-          </a:prstGeom>
-          <a:noFill/>
-          <a:ln/>
-        </p:spPr>
-        <p:txBody>
-          <a:bodyPr wrap="square" lIns="0" tIns="9716" rIns="0" bIns="-9716" rtlCol="0" anchor="t"/>
-          <a:lstStyle/>
-          <a:p>
-            <a:pPr algn="l" indent="0" marL="0">
-              <a:lnSpc>
-                <a:spcPts val="2340"/>
-              </a:lnSpc>
-              <a:buNone/>
-            </a:pPr>
-            <a:r>
-              <a:rPr lang="en-US" sz="1800" dirty="0" spc="10" kern="0">
-                <a:solidFill>
-                  <a:srgbClr val="D8D3C4"/>
-                </a:solidFill>
-                <a:latin typeface="Be Vietnam Pro" pitchFamily="34" charset="0"/>
-                <a:ea typeface="Be Vietnam Pro" pitchFamily="34" charset="-122"/>
-                <a:cs typeface="Be Vietnam Pro" pitchFamily="34" charset="-120"/>
-              </a:rPr>
-              <a:t>đệm</a:t>
-            </a:r>
-            <a:r>
-              <a:rPr lang="en-US" sz="1800" dirty="0" spc="2" kern="0">
-                <a:solidFill>
-                  <a:srgbClr val="D8D3C4"/>
-                </a:solidFill>
-                <a:latin typeface="Be Vietnam Pro" pitchFamily="34" charset="0"/>
-                <a:ea typeface="Be Vietnam Pro" pitchFamily="34" charset="-122"/>
-                <a:cs typeface="Be Vietnam Pro" pitchFamily="34" charset="-120"/>
-              </a:rPr>
-              <a:t> có</a:t>
-            </a:r>
-            <a:r>
-              <a:rPr lang="en-US" sz="1800" dirty="0" spc="-2" kern="0">
-                <a:solidFill>
-                  <a:srgbClr val="D8D3C4"/>
-                </a:solidFill>
-                <a:latin typeface="Be Vietnam Pro" pitchFamily="34" charset="0"/>
-                <a:ea typeface="Be Vietnam Pro" pitchFamily="34" charset="-122"/>
-                <a:cs typeface="Be Vietnam Pro" pitchFamily="34" charset="-120"/>
-              </a:rPr>
-              <a:t> phần</a:t>
-            </a:r>
-            <a:r>
-              <a:rPr lang="en-US" sz="1800" dirty="0" spc="-10" kern="0">
-                <a:solidFill>
-                  <a:srgbClr val="D8D3C4"/>
-                </a:solidFill>
-                <a:latin typeface="Be Vietnam Pro" pitchFamily="34" charset="0"/>
-                <a:ea typeface="Be Vietnam Pro" pitchFamily="34" charset="-122"/>
-                <a:cs typeface="Be Vietnam Pro" pitchFamily="34" charset="-120"/>
-              </a:rPr>
-              <a:t> ngẫu</a:t>
-            </a:r>
-            <a:r>
-              <a:rPr lang="en-US" sz="1800" dirty="0" spc="-2" kern="0">
-                <a:solidFill>
-                  <a:srgbClr val="D8D3C4"/>
-                </a:solidFill>
-                <a:latin typeface="Be Vietnam Pro" pitchFamily="34" charset="0"/>
-                <a:ea typeface="Be Vietnam Pro" pitchFamily="34" charset="-122"/>
-                <a:cs typeface="Be Vietnam Pro" pitchFamily="34" charset="-120"/>
-              </a:rPr>
-              <a:t> nhiên</a:t>
-            </a:r>
-            <a:r>
-              <a:rPr lang="en-US" sz="1800" dirty="0" spc="5" kern="0">
-                <a:solidFill>
-                  <a:srgbClr val="D8D3C4"/>
-                </a:solidFill>
-                <a:latin typeface="Be Vietnam Pro" pitchFamily="34" charset="0"/>
-                <a:ea typeface="Be Vietnam Pro" pitchFamily="34" charset="-122"/>
-                <a:cs typeface="Be Vietnam Pro" pitchFamily="34" charset="-120"/>
-              </a:rPr>
-              <a:t> trước</a:t>
-            </a:r>
-            <a:r>
-              <a:rPr lang="en-US" sz="1800" dirty="0" spc="0" kern="0">
-                <a:solidFill>
-                  <a:srgbClr val="D8D3C4"/>
-                </a:solidFill>
-                <a:latin typeface="Be Vietnam Pro" pitchFamily="34" charset="0"/>
-                <a:ea typeface="Be Vietnam Pro" pitchFamily="34" charset="-122"/>
-                <a:cs typeface="Be Vietnam Pro" pitchFamily="34" charset="-120"/>
-              </a:rPr>
-              <a:t> khi</a:t>
-            </a:r>
-            <a:r>
-              <a:rPr lang="en-US" sz="1800" dirty="0" spc="-1" kern="0">
-                <a:solidFill>
-                  <a:srgbClr val="D8D3C4"/>
-                </a:solidFill>
-                <a:latin typeface="Be Vietnam Pro" pitchFamily="34" charset="0"/>
-                <a:ea typeface="Be Vietnam Pro" pitchFamily="34" charset="-122"/>
-                <a:cs typeface="Be Vietnam Pro" pitchFamily="34" charset="-120"/>
-              </a:rPr>
-              <a:t> mã hóa</a:t>
-            </a:r>
-            <a:r>
-              <a:rPr lang="en-US" sz="1800" dirty="0" spc="-11" kern="0">
-                <a:solidFill>
-                  <a:srgbClr val="D8D3C4"/>
-                </a:solidFill>
-                <a:latin typeface="Be Vietnam Pro" pitchFamily="34" charset="0"/>
-                <a:ea typeface="Be Vietnam Pro" pitchFamily="34" charset="-122"/>
-                <a:cs typeface="Be Vietnam Pro" pitchFamily="34" charset="-120"/>
-              </a:rPr>
-              <a:t> RSA</a:t>
-            </a:r>
-            <a:endParaRPr lang="en-US" sz="1800" dirty="0"/>
-          </a:p>
-        </p:txBody>
-      </p:sp>
-      <p:sp>
-        <p:nvSpPr>
-          <p:cNvPr id="20" name="Shape 18"/>
-          <p:cNvSpPr/>
-          <p:nvPr/>
-        </p:nvSpPr>
-        <p:spPr>
-          <a:xfrm>
-            <a:off x="914400" y="5048250"/>
-            <a:ext cx="3943350" cy="2286000"/>
+          <p:cNvPr id="11" name="Shape 9"/>
+          <p:cNvSpPr/>
+          <p:nvPr/>
+        </p:nvSpPr>
+        <p:spPr>
+          <a:xfrm>
+            <a:off x="9220200" y="1447800"/>
+            <a:ext cx="4000500" cy="1962150"/>
           </a:xfrm>
           <a:prstGeom prst="roundRect">
             <a:avLst>
-              <a:gd name="adj" fmla="val 10000"/>
+              <a:gd name="adj" fmla="val 10680"/>
             </a:avLst>
           </a:prstGeom>
           <a:solidFill>
@@ -4281,14 +3729,14 @@
       </p:sp>
       <p:sp>
         <p:nvSpPr>
-          <p:cNvPr id="21" name="Text 19"/>
-          <p:cNvSpPr/>
-          <p:nvPr/>
-        </p:nvSpPr>
-        <p:spPr>
-          <a:xfrm>
-            <a:off x="1181100" y="5238750"/>
-            <a:ext cx="3409950" cy="647700"/>
+          <p:cNvPr id="12" name="Text 10"/>
+          <p:cNvSpPr/>
+          <p:nvPr/>
+        </p:nvSpPr>
+        <p:spPr>
+          <a:xfrm>
+            <a:off x="9448800" y="1600200"/>
+            <a:ext cx="3543300" cy="438150"/>
           </a:xfrm>
           <a:prstGeom prst="rect">
             <a:avLst/>
@@ -4304,30 +3752,30 @@
               <a:buNone/>
             </a:pPr>
             <a:r>
-              <a:rPr lang="en-US" sz="4200" dirty="0" spc="-2" kern="0">
-                <a:solidFill>
-                  <a:srgbClr val="3DD6A0"/>
+              <a:rPr lang="en-US" sz="2550" dirty="0" spc="-12" kern="0">
+                <a:solidFill>
+                  <a:srgbClr val="FFB454"/>
                 </a:solidFill>
                 <a:latin typeface="Bricolage Grotesque ExtraBold" pitchFamily="34" charset="0"/>
                 <a:ea typeface="Bricolage Grotesque ExtraBold" pitchFamily="34" charset="-122"/>
                 <a:cs typeface="Bricolage Grotesque ExtraBold" pitchFamily="34" charset="-120"/>
               </a:rPr>
-              <a:t>TLS</a:t>
-            </a:r>
-            <a:endParaRPr lang="en-US" sz="4200" dirty="0"/>
+              <a:t>RSA</a:t>
+            </a:r>
+            <a:endParaRPr lang="en-US" sz="2550" dirty="0"/>
           </a:p>
         </p:txBody>
       </p:sp>
       <p:sp>
         <p:nvSpPr>
-          <p:cNvPr id="22" name="Text 20"/>
-          <p:cNvSpPr/>
-          <p:nvPr/>
-        </p:nvSpPr>
-        <p:spPr>
-          <a:xfrm>
-            <a:off x="1181100" y="5924550"/>
-            <a:ext cx="3409950" cy="571500"/>
+          <p:cNvPr id="13" name="Text 11"/>
+          <p:cNvSpPr/>
+          <p:nvPr/>
+        </p:nvSpPr>
+        <p:spPr>
+          <a:xfrm>
+            <a:off x="9448800" y="2057400"/>
+            <a:ext cx="3543300" cy="571500"/>
           </a:xfrm>
           <a:prstGeom prst="rect">
             <a:avLst/>
@@ -4346,7 +3794,7 @@
               <a:buNone/>
             </a:pPr>
             <a:r>
-              <a:rPr lang="en-US" sz="1650" dirty="0" spc="-22" kern="0">
+              <a:rPr lang="en-US" sz="1650" dirty="0" spc="-4" kern="0">
                 <a:solidFill>
                   <a:srgbClr val="9A98A0"/>
                 </a:solidFill>
@@ -4354,29 +3802,7 @@
                 <a:ea typeface="Be Vietnam Pro" pitchFamily="34" charset="-122"/>
                 <a:cs typeface="Be Vietnam Pro" pitchFamily="34" charset="-120"/>
               </a:rPr>
-              <a:t>Transport</a:t>
-            </a:r>
-            <a:r>
-              <a:rPr lang="en-US" sz="1650" dirty="0" spc="-25" kern="0">
-                <a:solidFill>
-                  <a:srgbClr val="9A98A0"/>
-                </a:solidFill>
-                <a:latin typeface="Be Vietnam Pro" pitchFamily="34" charset="0"/>
-                <a:ea typeface="Be Vietnam Pro" pitchFamily="34" charset="-122"/>
-                <a:cs typeface="Be Vietnam Pro" pitchFamily="34" charset="-120"/>
-              </a:rPr>
-              <a:t> Layer</a:t>
-            </a:r>
-            <a:r>
-              <a:rPr lang="en-US" sz="1650" dirty="0" spc="1" kern="0">
-                <a:solidFill>
-                  <a:srgbClr val="9A98A0"/>
-                </a:solidFill>
-                <a:latin typeface="Be Vietnam Pro" pitchFamily="34" charset="0"/>
-                <a:ea typeface="Be Vietnam Pro" pitchFamily="34" charset="-122"/>
-                <a:cs typeface="Be Vietnam Pro" pitchFamily="34" charset="-120"/>
-              </a:rPr>
-              <a:t> Security</a:t>
+              <a:t>Rivest-Shamir-Adleman</a:t>
             </a:r>
             <a:endParaRPr lang="en-US" sz="1650" dirty="0"/>
           </a:p>
@@ -4384,205 +3810,14 @@
       </p:sp>
       <p:sp>
         <p:nvSpPr>
-          <p:cNvPr id="23" name="Text 21"/>
-          <p:cNvSpPr/>
-          <p:nvPr/>
-        </p:nvSpPr>
-        <p:spPr>
-          <a:xfrm>
-            <a:off x="1181100" y="6534150"/>
-            <a:ext cx="3409950" cy="666750"/>
-          </a:xfrm>
-          <a:prstGeom prst="rect">
-            <a:avLst/>
-          </a:prstGeom>
-          <a:noFill/>
-          <a:ln/>
-        </p:spPr>
-        <p:txBody>
-          <a:bodyPr wrap="square" lIns="0" tIns="9716" rIns="0" bIns="-9716" rtlCol="0" anchor="t"/>
-          <a:lstStyle/>
-          <a:p>
-            <a:pPr algn="l" indent="0" marL="0">
-              <a:lnSpc>
-                <a:spcPts val="2340"/>
-              </a:lnSpc>
-              <a:buNone/>
-            </a:pPr>
-            <a:r>
-              <a:rPr lang="en-US" sz="1800" dirty="0" spc="2" kern="0">
-                <a:solidFill>
-                  <a:srgbClr val="D8D3C4"/>
-                </a:solidFill>
-                <a:latin typeface="Be Vietnam Pro" pitchFamily="34" charset="0"/>
-                <a:ea typeface="Be Vietnam Pro" pitchFamily="34" charset="-122"/>
-                <a:cs typeface="Be Vietnam Pro" pitchFamily="34" charset="-120"/>
-              </a:rPr>
-              <a:t>giao</a:t>
-            </a:r>
-            <a:r>
-              <a:rPr lang="en-US" sz="1800" dirty="0" spc="5" kern="0">
-                <a:solidFill>
-                  <a:srgbClr val="D8D3C4"/>
-                </a:solidFill>
-                <a:latin typeface="Be Vietnam Pro" pitchFamily="34" charset="0"/>
-                <a:ea typeface="Be Vietnam Pro" pitchFamily="34" charset="-122"/>
-                <a:cs typeface="Be Vietnam Pro" pitchFamily="34" charset="-120"/>
-              </a:rPr>
-              <a:t> thức</a:t>
-            </a:r>
-            <a:r>
-              <a:rPr lang="en-US" sz="1800" dirty="0" spc="-12" kern="0">
-                <a:solidFill>
-                  <a:srgbClr val="D8D3C4"/>
-                </a:solidFill>
-                <a:latin typeface="Be Vietnam Pro" pitchFamily="34" charset="0"/>
-                <a:ea typeface="Be Vietnam Pro" pitchFamily="34" charset="-122"/>
-                <a:cs typeface="Be Vietnam Pro" pitchFamily="34" charset="-120"/>
-              </a:rPr>
-              <a:t> bắt</a:t>
-            </a:r>
-            <a:r>
-              <a:rPr lang="en-US" sz="1800" dirty="0" spc="-13" kern="0">
-                <a:solidFill>
-                  <a:srgbClr val="D8D3C4"/>
-                </a:solidFill>
-                <a:latin typeface="Be Vietnam Pro" pitchFamily="34" charset="0"/>
-                <a:ea typeface="Be Vietnam Pro" pitchFamily="34" charset="-122"/>
-                <a:cs typeface="Be Vietnam Pro" pitchFamily="34" charset="-120"/>
-              </a:rPr>
-              <a:t> tay,</a:t>
-            </a:r>
-            <a:r>
-              <a:rPr lang="en-US" sz="1800" dirty="0" spc="-3" kern="0">
-                <a:solidFill>
-                  <a:srgbClr val="D8D3C4"/>
-                </a:solidFill>
-                <a:latin typeface="Be Vietnam Pro" pitchFamily="34" charset="0"/>
-                <a:ea typeface="Be Vietnam Pro" pitchFamily="34" charset="-122"/>
-                <a:cs typeface="Be Vietnam Pro" pitchFamily="34" charset="-120"/>
-              </a:rPr>
-              <a:t> thống</a:t>
-            </a:r>
-            <a:r>
-              <a:rPr lang="en-US" sz="1800" dirty="0" spc="-9" kern="0">
-                <a:solidFill>
-                  <a:srgbClr val="D8D3C4"/>
-                </a:solidFill>
-                <a:latin typeface="Be Vietnam Pro" pitchFamily="34" charset="0"/>
-                <a:ea typeface="Be Vietnam Pro" pitchFamily="34" charset="-122"/>
-                <a:cs typeface="Be Vietnam Pro" pitchFamily="34" charset="-120"/>
-              </a:rPr>
-              <a:t> nhất</a:t>
-            </a:r>
-            <a:r>
-              <a:rPr lang="en-US" sz="1800" dirty="0" spc="-1" kern="0">
-                <a:solidFill>
-                  <a:srgbClr val="D8D3C4"/>
-                </a:solidFill>
-                <a:latin typeface="Be Vietnam Pro" pitchFamily="34" charset="0"/>
-                <a:ea typeface="Be Vietnam Pro" pitchFamily="34" charset="-122"/>
-                <a:cs typeface="Be Vietnam Pro" pitchFamily="34" charset="-120"/>
-              </a:rPr>
-              <a:t> khóa</a:t>
-            </a:r>
-            <a:r>
-              <a:rPr lang="en-US" sz="1800" dirty="0" spc="-16" kern="0">
-                <a:solidFill>
-                  <a:srgbClr val="D8D3C4"/>
-                </a:solidFill>
-                <a:latin typeface="Be Vietnam Pro" pitchFamily="34" charset="0"/>
-                <a:ea typeface="Be Vietnam Pro" pitchFamily="34" charset="-122"/>
-                <a:cs typeface="Be Vietnam Pro" pitchFamily="34" charset="-120"/>
-              </a:rPr>
-              <a:t> rồi</a:t>
-            </a:r>
-            <a:r>
-              <a:rPr lang="en-US" sz="1800" dirty="0" spc="-1" kern="0">
-                <a:solidFill>
-                  <a:srgbClr val="D8D3C4"/>
-                </a:solidFill>
-                <a:latin typeface="Be Vietnam Pro" pitchFamily="34" charset="0"/>
-                <a:ea typeface="Be Vietnam Pro" pitchFamily="34" charset="-122"/>
-                <a:cs typeface="Be Vietnam Pro" pitchFamily="34" charset="-120"/>
-              </a:rPr>
-              <a:t> mã hóa</a:t>
-            </a:r>
-            <a:endParaRPr lang="en-US" sz="1800" dirty="0"/>
-          </a:p>
-        </p:txBody>
-      </p:sp>
-      <p:sp>
-        <p:nvSpPr>
-          <p:cNvPr id="24" name="Shape 22"/>
-          <p:cNvSpPr/>
-          <p:nvPr/>
-        </p:nvSpPr>
-        <p:spPr>
-          <a:xfrm>
-            <a:off x="5086350" y="5048250"/>
-            <a:ext cx="3943350" cy="2286000"/>
-          </a:xfrm>
-          <a:prstGeom prst="roundRect">
-            <a:avLst>
-              <a:gd name="adj" fmla="val 10000"/>
-            </a:avLst>
-          </a:prstGeom>
-          <a:solidFill>
-            <a:srgbClr val="1E212B"/>
-          </a:solidFill>
-          <a:ln/>
-        </p:spPr>
-      </p:sp>
-      <p:sp>
-        <p:nvSpPr>
-          <p:cNvPr id="25" name="Text 23"/>
-          <p:cNvSpPr/>
-          <p:nvPr/>
-        </p:nvSpPr>
-        <p:spPr>
-          <a:xfrm>
-            <a:off x="5353050" y="5238750"/>
-            <a:ext cx="3409950" cy="647700"/>
-          </a:xfrm>
-          <a:prstGeom prst="rect">
-            <a:avLst/>
-          </a:prstGeom>
-          <a:noFill/>
-          <a:ln/>
-        </p:spPr>
-        <p:txBody>
-          <a:bodyPr wrap="square" lIns="0" tIns="0" rIns="0" bIns="0" rtlCol="0" anchor="t"/>
-          <a:lstStyle/>
-          <a:p>
-            <a:pPr algn="l" indent="0" marL="0">
-              <a:buNone/>
-            </a:pPr>
-            <a:r>
-              <a:rPr lang="en-US" sz="4200" dirty="0" kern="0">
-                <a:solidFill>
-                  <a:srgbClr val="D8D3C4"/>
-                </a:solidFill>
-                <a:latin typeface="Bricolage Grotesque ExtraBold" pitchFamily="34" charset="0"/>
-                <a:ea typeface="Bricolage Grotesque ExtraBold" pitchFamily="34" charset="-122"/>
-                <a:cs typeface="Bricolage Grotesque ExtraBold" pitchFamily="34" charset="-120"/>
-              </a:rPr>
-              <a:t>SHA</a:t>
-            </a:r>
-            <a:endParaRPr lang="en-US" sz="4200" dirty="0"/>
-          </a:p>
-        </p:txBody>
-      </p:sp>
-      <p:sp>
-        <p:nvSpPr>
-          <p:cNvPr id="26" name="Text 24"/>
-          <p:cNvSpPr/>
-          <p:nvPr/>
-        </p:nvSpPr>
-        <p:spPr>
-          <a:xfrm>
-            <a:off x="5353050" y="5924550"/>
-            <a:ext cx="3409950" cy="571500"/>
+          <p:cNvPr id="14" name="Text 12"/>
+          <p:cNvSpPr/>
+          <p:nvPr/>
+        </p:nvSpPr>
+        <p:spPr>
+          <a:xfrm>
+            <a:off x="9448800" y="2667000"/>
+            <a:ext cx="3543300" cy="609600"/>
           </a:xfrm>
           <a:prstGeom prst="rect">
             <a:avLst/>
@@ -4601,37 +3836,59 @@
               <a:buNone/>
             </a:pPr>
             <a:r>
-              <a:rPr lang="en-US" sz="1650" dirty="0" spc="-14" kern="0">
-                <a:solidFill>
-                  <a:srgbClr val="9A98A0"/>
-                </a:solidFill>
-                <a:latin typeface="Be Vietnam Pro" pitchFamily="34" charset="0"/>
-                <a:ea typeface="Be Vietnam Pro" pitchFamily="34" charset="-122"/>
-                <a:cs typeface="Be Vietnam Pro" pitchFamily="34" charset="-120"/>
-              </a:rPr>
-              <a:t>Secure</a:t>
+              <a:rPr lang="en-US" sz="1650" dirty="0" spc="-4" kern="0">
+                <a:solidFill>
+                  <a:srgbClr val="D8D3C4"/>
+                </a:solidFill>
+                <a:latin typeface="Be Vietnam Pro" pitchFamily="34" charset="0"/>
+                <a:ea typeface="Be Vietnam Pro" pitchFamily="34" charset="-122"/>
+                <a:cs typeface="Be Vietnam Pro" pitchFamily="34" charset="-120"/>
+              </a:rPr>
+              <a:t>thuật</a:t>
+            </a:r>
+            <a:r>
+              <a:rPr lang="en-US" sz="1650" dirty="0" spc="-8" kern="0">
+                <a:solidFill>
+                  <a:srgbClr val="D8D3C4"/>
+                </a:solidFill>
+                <a:latin typeface="Be Vietnam Pro" pitchFamily="34" charset="0"/>
+                <a:ea typeface="Be Vietnam Pro" pitchFamily="34" charset="-122"/>
+                <a:cs typeface="Be Vietnam Pro" pitchFamily="34" charset="-120"/>
+              </a:rPr>
+              <a:t> toán</a:t>
+            </a:r>
+            <a:r>
+              <a:rPr lang="en-US" sz="1650" dirty="0" spc="2" kern="0">
+                <a:solidFill>
+                  <a:srgbClr val="D8D3C4"/>
+                </a:solidFill>
+                <a:latin typeface="Be Vietnam Pro" pitchFamily="34" charset="0"/>
+                <a:ea typeface="Be Vietnam Pro" pitchFamily="34" charset="-122"/>
+                <a:cs typeface="Be Vietnam Pro" pitchFamily="34" charset="-120"/>
+              </a:rPr>
+              <a:t> mã</a:t>
+            </a:r>
+            <a:r>
+              <a:rPr lang="en-US" sz="1650" dirty="0" spc="-1" kern="0">
+                <a:solidFill>
+                  <a:srgbClr val="D8D3C4"/>
+                </a:solidFill>
+                <a:latin typeface="Be Vietnam Pro" pitchFamily="34" charset="0"/>
+                <a:ea typeface="Be Vietnam Pro" pitchFamily="34" charset="-122"/>
+                <a:cs typeface="Be Vietnam Pro" pitchFamily="34" charset="-120"/>
+              </a:rPr>
+              <a:t> hóa khóa</a:t>
             </a:r>
             <a:r>
               <a:rPr lang="en-US" sz="1650" dirty="0" spc="0" kern="0">
                 <a:solidFill>
-                  <a:srgbClr val="9A98A0"/>
-                </a:solidFill>
-                <a:latin typeface="Be Vietnam Pro" pitchFamily="34" charset="0"/>
-                <a:ea typeface="Be Vietnam Pro" pitchFamily="34" charset="-122"/>
-                <a:cs typeface="Be Vietnam Pro" pitchFamily="34" charset="-120"/>
-              </a:rPr>
-              <a:t> Hash</a:t>
-            </a:r>
-            <a:r>
-              <a:rPr lang="en-US" sz="1650" dirty="0" spc="-1" kern="0">
-                <a:solidFill>
-                  <a:srgbClr val="9A98A0"/>
-                </a:solidFill>
-                <a:latin typeface="Be Vietnam Pro" pitchFamily="34" charset="0"/>
-                <a:ea typeface="Be Vietnam Pro" pitchFamily="34" charset="-122"/>
-                <a:cs typeface="Be Vietnam Pro" pitchFamily="34" charset="-120"/>
-              </a:rPr>
-              <a:t> Algorithm</a:t>
+                  <a:srgbClr val="D8D3C4"/>
+                </a:solidFill>
+                <a:latin typeface="Be Vietnam Pro" pitchFamily="34" charset="0"/>
+                <a:ea typeface="Be Vietnam Pro" pitchFamily="34" charset="-122"/>
+                <a:cs typeface="Be Vietnam Pro" pitchFamily="34" charset="-120"/>
+              </a:rPr>
+              <a:t> công khai</a:t>
             </a:r>
             <a:endParaRPr lang="en-US" sz="1650" dirty="0"/>
           </a:p>
@@ -4639,148 +3896,18 @@
       </p:sp>
       <p:sp>
         <p:nvSpPr>
-          <p:cNvPr id="27" name="Text 25"/>
-          <p:cNvSpPr/>
-          <p:nvPr/>
-        </p:nvSpPr>
-        <p:spPr>
-          <a:xfrm>
-            <a:off x="5353050" y="6534150"/>
-            <a:ext cx="3409950" cy="666750"/>
-          </a:xfrm>
-          <a:prstGeom prst="rect">
-            <a:avLst/>
-          </a:prstGeom>
-          <a:noFill/>
-          <a:ln/>
-        </p:spPr>
-        <p:txBody>
-          <a:bodyPr wrap="square" lIns="0" tIns="9716" rIns="0" bIns="-9716" rtlCol="0" anchor="t"/>
-          <a:lstStyle/>
-          <a:p>
-            <a:pPr algn="l" indent="0" marL="0">
-              <a:lnSpc>
-                <a:spcPts val="2340"/>
-              </a:lnSpc>
-              <a:buNone/>
-            </a:pPr>
-            <a:r>
-              <a:rPr lang="en-US" sz="1800" dirty="0" spc="-1" kern="0">
-                <a:solidFill>
-                  <a:srgbClr val="D8D3C4"/>
-                </a:solidFill>
-                <a:latin typeface="Be Vietnam Pro" pitchFamily="34" charset="0"/>
-                <a:ea typeface="Be Vietnam Pro" pitchFamily="34" charset="-122"/>
-                <a:cs typeface="Be Vietnam Pro" pitchFamily="34" charset="-120"/>
-              </a:rPr>
-              <a:t>họ</a:t>
-            </a:r>
-            <a:r>
-              <a:rPr lang="en-US" sz="1800" dirty="0" spc="-8" kern="0">
-                <a:solidFill>
-                  <a:srgbClr val="D8D3C4"/>
-                </a:solidFill>
-                <a:latin typeface="Be Vietnam Pro" pitchFamily="34" charset="0"/>
-                <a:ea typeface="Be Vietnam Pro" pitchFamily="34" charset="-122"/>
-                <a:cs typeface="Be Vietnam Pro" pitchFamily="34" charset="-120"/>
-              </a:rPr>
-              <a:t> thuật</a:t>
-            </a:r>
-            <a:r>
-              <a:rPr lang="en-US" sz="1800" dirty="0" spc="-10" kern="0">
-                <a:solidFill>
-                  <a:srgbClr val="D8D3C4"/>
-                </a:solidFill>
-                <a:latin typeface="Be Vietnam Pro" pitchFamily="34" charset="0"/>
-                <a:ea typeface="Be Vietnam Pro" pitchFamily="34" charset="-122"/>
-                <a:cs typeface="Be Vietnam Pro" pitchFamily="34" charset="-120"/>
-              </a:rPr>
-              <a:t> toán</a:t>
-            </a:r>
-            <a:r>
-              <a:rPr lang="en-US" sz="1800" dirty="0" spc="-4" kern="0">
-                <a:solidFill>
-                  <a:srgbClr val="D8D3C4"/>
-                </a:solidFill>
-                <a:latin typeface="Be Vietnam Pro" pitchFamily="34" charset="0"/>
-                <a:ea typeface="Be Vietnam Pro" pitchFamily="34" charset="-122"/>
-                <a:cs typeface="Be Vietnam Pro" pitchFamily="34" charset="-120"/>
-              </a:rPr>
-              <a:t> băm,</a:t>
-            </a:r>
-            <a:r>
-              <a:rPr lang="en-US" sz="1800" dirty="0" spc="1" kern="0">
-                <a:solidFill>
-                  <a:srgbClr val="D8D3C4"/>
-                </a:solidFill>
-                <a:latin typeface="Be Vietnam Pro" pitchFamily="34" charset="0"/>
-                <a:ea typeface="Be Vietnam Pro" pitchFamily="34" charset="-122"/>
-                <a:cs typeface="Be Vietnam Pro" pitchFamily="34" charset="-120"/>
-              </a:rPr>
-              <a:t> ở</a:t>
-            </a:r>
-            <a:r>
-              <a:rPr lang="en-US" sz="1800" dirty="0" spc="3" kern="0">
-                <a:solidFill>
-                  <a:srgbClr val="D8D3C4"/>
-                </a:solidFill>
-                <a:latin typeface="Be Vietnam Pro" pitchFamily="34" charset="0"/>
-                <a:ea typeface="Be Vietnam Pro" pitchFamily="34" charset="-122"/>
-                <a:cs typeface="Be Vietnam Pro" pitchFamily="34" charset="-120"/>
-              </a:rPr>
-              <a:t> đây</a:t>
-            </a:r>
-            <a:r>
-              <a:rPr lang="en-US" sz="1800" dirty="0" spc="-2" kern="0">
-                <a:solidFill>
-                  <a:srgbClr val="D8D3C4"/>
-                </a:solidFill>
-                <a:latin typeface="Be Vietnam Pro" pitchFamily="34" charset="0"/>
-                <a:ea typeface="Be Vietnam Pro" pitchFamily="34" charset="-122"/>
-                <a:cs typeface="Be Vietnam Pro" pitchFamily="34" charset="-120"/>
-              </a:rPr>
-              <a:t> nằm</a:t>
-            </a:r>
-            <a:r>
-              <a:rPr lang="en-US" sz="1800" dirty="0" spc="-12" kern="0">
-                <a:solidFill>
-                  <a:srgbClr val="D8D3C4"/>
-                </a:solidFill>
-                <a:latin typeface="Be Vietnam Pro" pitchFamily="34" charset="0"/>
-                <a:ea typeface="Be Vietnam Pro" pitchFamily="34" charset="-122"/>
-                <a:cs typeface="Be Vietnam Pro" pitchFamily="34" charset="-120"/>
-              </a:rPr>
-              <a:t> trong</a:t>
-            </a:r>
-            <a:r>
-              <a:rPr lang="en-US" sz="1800" dirty="0" spc="-15" kern="0">
-                <a:solidFill>
-                  <a:srgbClr val="D8D3C4"/>
-                </a:solidFill>
-                <a:latin typeface="Be Vietnam Pro" pitchFamily="34" charset="0"/>
-                <a:ea typeface="Be Vietnam Pro" pitchFamily="34" charset="-122"/>
-                <a:cs typeface="Be Vietnam Pro" pitchFamily="34" charset="-120"/>
-              </a:rPr>
-              <a:t> OAEP</a:t>
-            </a:r>
-            <a:endParaRPr lang="en-US" sz="1800" dirty="0"/>
-          </a:p>
-        </p:txBody>
-      </p:sp>
-      <p:sp>
-        <p:nvSpPr>
-          <p:cNvPr id="28" name="Shape 26"/>
-          <p:cNvSpPr/>
-          <p:nvPr/>
-        </p:nvSpPr>
-        <p:spPr>
-          <a:xfrm>
-            <a:off x="9258300" y="5048250"/>
-            <a:ext cx="3943350" cy="2286000"/>
+          <p:cNvPr id="15" name="Shape 13"/>
+          <p:cNvSpPr/>
+          <p:nvPr/>
+        </p:nvSpPr>
+        <p:spPr>
+          <a:xfrm>
+            <a:off x="13373100" y="1447800"/>
+            <a:ext cx="4000500" cy="1962150"/>
           </a:xfrm>
           <a:prstGeom prst="roundRect">
             <a:avLst>
-              <a:gd name="adj" fmla="val 10000"/>
+              <a:gd name="adj" fmla="val 10680"/>
             </a:avLst>
           </a:prstGeom>
           <a:solidFill>
@@ -4791,14 +3918,14 @@
       </p:sp>
       <p:sp>
         <p:nvSpPr>
-          <p:cNvPr id="29" name="Text 27"/>
-          <p:cNvSpPr/>
-          <p:nvPr/>
-        </p:nvSpPr>
-        <p:spPr>
-          <a:xfrm>
-            <a:off x="9525000" y="5238750"/>
-            <a:ext cx="3409950" cy="647700"/>
+          <p:cNvPr id="16" name="Text 14"/>
+          <p:cNvSpPr/>
+          <p:nvPr/>
+        </p:nvSpPr>
+        <p:spPr>
+          <a:xfrm>
+            <a:off x="13601700" y="1600200"/>
+            <a:ext cx="3543300" cy="438150"/>
           </a:xfrm>
           <a:prstGeom prst="rect">
             <a:avLst/>
@@ -4814,30 +3941,30 @@
               <a:buNone/>
             </a:pPr>
             <a:r>
-              <a:rPr lang="en-US" sz="4200" dirty="0" spc="6" kern="0">
-                <a:solidFill>
-                  <a:srgbClr val="D8D3C4"/>
+              <a:rPr lang="en-US" sz="2550" dirty="0" spc="-25" kern="0">
+                <a:solidFill>
+                  <a:srgbClr val="FFB454"/>
                 </a:solidFill>
                 <a:latin typeface="Bricolage Grotesque ExtraBold" pitchFamily="34" charset="0"/>
                 <a:ea typeface="Bricolage Grotesque ExtraBold" pitchFamily="34" charset="-122"/>
                 <a:cs typeface="Bricolage Grotesque ExtraBold" pitchFamily="34" charset="-120"/>
               </a:rPr>
-              <a:t>MiB</a:t>
-            </a:r>
-            <a:endParaRPr lang="en-US" sz="4200" dirty="0"/>
+              <a:t>OAEP</a:t>
+            </a:r>
+            <a:endParaRPr lang="en-US" sz="2550" dirty="0"/>
           </a:p>
         </p:txBody>
       </p:sp>
       <p:sp>
         <p:nvSpPr>
-          <p:cNvPr id="30" name="Text 28"/>
-          <p:cNvSpPr/>
-          <p:nvPr/>
-        </p:nvSpPr>
-        <p:spPr>
-          <a:xfrm>
-            <a:off x="9525000" y="5924550"/>
-            <a:ext cx="3409950" cy="571500"/>
+          <p:cNvPr id="17" name="Text 15"/>
+          <p:cNvSpPr/>
+          <p:nvPr/>
+        </p:nvSpPr>
+        <p:spPr>
+          <a:xfrm>
+            <a:off x="13601700" y="2057400"/>
+            <a:ext cx="3543300" cy="571500"/>
           </a:xfrm>
           <a:prstGeom prst="rect">
             <a:avLst/>
@@ -4856,7 +3983,7 @@
               <a:buNone/>
             </a:pPr>
             <a:r>
-              <a:rPr lang="en-US" sz="1650" dirty="0" spc="-7" kern="0">
+              <a:rPr lang="en-US" sz="1650" dirty="0" spc="-3" kern="0">
                 <a:solidFill>
                   <a:srgbClr val="9A98A0"/>
                 </a:solidFill>
@@ -4864,7 +3991,40 @@
                 <a:ea typeface="Be Vietnam Pro" pitchFamily="34" charset="-122"/>
                 <a:cs typeface="Be Vietnam Pro" pitchFamily="34" charset="-120"/>
               </a:rPr>
-              <a:t>Mebibyte</a:t>
+              <a:t>Optimal</a:t>
+            </a:r>
+            <a:r>
+              <a:rPr lang="en-US" sz="1650" dirty="0" spc="-1" kern="0">
+                <a:solidFill>
+                  <a:srgbClr val="9A98A0"/>
+                </a:solidFill>
+                <a:latin typeface="Be Vietnam Pro" pitchFamily="34" charset="0"/>
+                <a:ea typeface="Be Vietnam Pro" pitchFamily="34" charset="-122"/>
+                <a:cs typeface="Be Vietnam Pro" pitchFamily="34" charset="-120"/>
+              </a:rPr>
+              <a:t> Asymmetric</a:t>
+            </a:r>
+            <a:r>
+              <a:rPr lang="en-US" sz="1650" dirty="0" spc="-2" kern="0">
+                <a:solidFill>
+                  <a:srgbClr val="9A98A0"/>
+                </a:solidFill>
+                <a:latin typeface="Be Vietnam Pro" pitchFamily="34" charset="0"/>
+                <a:ea typeface="Be Vietnam Pro" pitchFamily="34" charset="-122"/>
+                <a:cs typeface="Be Vietnam Pro" pitchFamily="34" charset="-120"/>
+              </a:rPr>
+              <a:t> Encryption</a:t>
+            </a:r>
+            <a:r>
+              <a:rPr lang="en-US" sz="1650" dirty="0" spc="-5" kern="0">
+                <a:solidFill>
+                  <a:srgbClr val="9A98A0"/>
+                </a:solidFill>
+                <a:latin typeface="Be Vietnam Pro" pitchFamily="34" charset="0"/>
+                <a:ea typeface="Be Vietnam Pro" pitchFamily="34" charset="-122"/>
+                <a:cs typeface="Be Vietnam Pro" pitchFamily="34" charset="-120"/>
+              </a:rPr>
+              <a:t> Padding</a:t>
             </a:r>
             <a:endParaRPr lang="en-US" sz="1650" dirty="0"/>
           </a:p>
@@ -4872,172 +4032,14 @@
       </p:sp>
       <p:sp>
         <p:nvSpPr>
-          <p:cNvPr id="31" name="Text 29"/>
-          <p:cNvSpPr/>
-          <p:nvPr/>
-        </p:nvSpPr>
-        <p:spPr>
-          <a:xfrm>
-            <a:off x="9525000" y="6534150"/>
-            <a:ext cx="3409950" cy="666750"/>
-          </a:xfrm>
-          <a:prstGeom prst="rect">
-            <a:avLst/>
-          </a:prstGeom>
-          <a:noFill/>
-          <a:ln/>
-        </p:spPr>
-        <p:txBody>
-          <a:bodyPr wrap="square" lIns="0" tIns="9716" rIns="0" bIns="-9716" rtlCol="0" anchor="t"/>
-          <a:lstStyle/>
-          <a:p>
-            <a:pPr algn="l" indent="0" marL="0">
-              <a:lnSpc>
-                <a:spcPts val="2340"/>
-              </a:lnSpc>
-              <a:buNone/>
-            </a:pPr>
-            <a:r>
-              <a:rPr lang="en-US" sz="1800" dirty="0" spc="-4" kern="0">
-                <a:solidFill>
-                  <a:srgbClr val="D8D3C4"/>
-                </a:solidFill>
-                <a:latin typeface="Be Vietnam Pro" pitchFamily="34" charset="0"/>
-                <a:ea typeface="Be Vietnam Pro" pitchFamily="34" charset="-122"/>
-                <a:cs typeface="Be Vietnam Pro" pitchFamily="34" charset="-120"/>
-              </a:rPr>
-              <a:t>1.048.576</a:t>
-            </a:r>
-            <a:r>
-              <a:rPr lang="en-US" sz="1800" dirty="0" spc="-12" kern="0">
-                <a:solidFill>
-                  <a:srgbClr val="D8D3C4"/>
-                </a:solidFill>
-                <a:latin typeface="Be Vietnam Pro" pitchFamily="34" charset="0"/>
-                <a:ea typeface="Be Vietnam Pro" pitchFamily="34" charset="-122"/>
-                <a:cs typeface="Be Vietnam Pro" pitchFamily="34" charset="-120"/>
-              </a:rPr>
-              <a:t> byte, gần</a:t>
-            </a:r>
-            <a:r>
-              <a:rPr lang="en-US" sz="1800" dirty="0" spc="-4" kern="0">
-                <a:solidFill>
-                  <a:srgbClr val="D8D3C4"/>
-                </a:solidFill>
-                <a:latin typeface="Be Vietnam Pro" pitchFamily="34" charset="0"/>
-                <a:ea typeface="Be Vietnam Pro" pitchFamily="34" charset="-122"/>
-                <a:cs typeface="Be Vietnam Pro" pitchFamily="34" charset="-120"/>
-              </a:rPr>
-              <a:t> bằng</a:t>
-            </a:r>
-            <a:r>
-              <a:rPr lang="en-US" sz="1800" dirty="0" spc="-6" kern="0">
-                <a:solidFill>
-                  <a:srgbClr val="D8D3C4"/>
-                </a:solidFill>
-                <a:latin typeface="Be Vietnam Pro" pitchFamily="34" charset="0"/>
-                <a:ea typeface="Be Vietnam Pro" pitchFamily="34" charset="-122"/>
-                <a:cs typeface="Be Vietnam Pro" pitchFamily="34" charset="-120"/>
-              </a:rPr>
-              <a:t> một</a:t>
-            </a:r>
-            <a:r>
-              <a:rPr lang="en-US" sz="1800" dirty="0" spc="5" kern="0">
-                <a:solidFill>
-                  <a:srgbClr val="D8D3C4"/>
-                </a:solidFill>
-                <a:latin typeface="Be Vietnam Pro" pitchFamily="34" charset="0"/>
-                <a:ea typeface="Be Vietnam Pro" pitchFamily="34" charset="-122"/>
-                <a:cs typeface="Be Vietnam Pro" pitchFamily="34" charset="-120"/>
-              </a:rPr>
-              <a:t> triệu</a:t>
-            </a:r>
-            <a:r>
-              <a:rPr lang="en-US" sz="1800" dirty="0" spc="-14" kern="0">
-                <a:solidFill>
-                  <a:srgbClr val="D8D3C4"/>
-                </a:solidFill>
-                <a:latin typeface="Be Vietnam Pro" pitchFamily="34" charset="0"/>
-                <a:ea typeface="Be Vietnam Pro" pitchFamily="34" charset="-122"/>
-                <a:cs typeface="Be Vietnam Pro" pitchFamily="34" charset="-120"/>
-              </a:rPr>
-              <a:t> byte</a:t>
-            </a:r>
-            <a:endParaRPr lang="en-US" sz="1800" dirty="0"/>
-          </a:p>
-        </p:txBody>
-      </p:sp>
-      <p:sp>
-        <p:nvSpPr>
-          <p:cNvPr id="32" name="Shape 30"/>
-          <p:cNvSpPr/>
-          <p:nvPr/>
-        </p:nvSpPr>
-        <p:spPr>
-          <a:xfrm>
-            <a:off x="13430250" y="5048250"/>
-            <a:ext cx="3943350" cy="2286000"/>
-          </a:xfrm>
-          <a:prstGeom prst="roundRect">
-            <a:avLst>
-              <a:gd name="adj" fmla="val 10000"/>
-            </a:avLst>
-          </a:prstGeom>
-          <a:solidFill>
-            <a:srgbClr val="1E212B"/>
-          </a:solidFill>
-          <a:ln/>
-        </p:spPr>
-      </p:sp>
-      <p:sp>
-        <p:nvSpPr>
-          <p:cNvPr id="33" name="Text 31"/>
-          <p:cNvSpPr/>
-          <p:nvPr/>
-        </p:nvSpPr>
-        <p:spPr>
-          <a:xfrm>
-            <a:off x="13696950" y="5238750"/>
-            <a:ext cx="3409950" cy="647700"/>
-          </a:xfrm>
-          <a:prstGeom prst="rect">
-            <a:avLst/>
-          </a:prstGeom>
-          <a:noFill/>
-          <a:ln/>
-        </p:spPr>
-        <p:txBody>
-          <a:bodyPr wrap="square" lIns="0" tIns="0" rIns="0" bIns="0" rtlCol="0" anchor="t"/>
-          <a:lstStyle/>
-          <a:p>
-            <a:pPr algn="l" indent="0" marL="0">
-              <a:buNone/>
-            </a:pPr>
-            <a:r>
-              <a:rPr lang="en-US" sz="4200" dirty="0" spc="2" kern="0">
-                <a:solidFill>
-                  <a:srgbClr val="3DD6A0"/>
-                </a:solidFill>
-                <a:latin typeface="Bricolage Grotesque ExtraBold" pitchFamily="34" charset="0"/>
-                <a:ea typeface="Bricolage Grotesque ExtraBold" pitchFamily="34" charset="-122"/>
-                <a:cs typeface="Bricolage Grotesque ExtraBold" pitchFamily="34" charset="-120"/>
-              </a:rPr>
-              <a:t>HPKE</a:t>
-            </a:r>
-            <a:endParaRPr lang="en-US" sz="4200" dirty="0"/>
-          </a:p>
-        </p:txBody>
-      </p:sp>
-      <p:sp>
-        <p:nvSpPr>
-          <p:cNvPr id="34" name="Text 32"/>
-          <p:cNvSpPr/>
-          <p:nvPr/>
-        </p:nvSpPr>
-        <p:spPr>
-          <a:xfrm>
-            <a:off x="13696950" y="5924550"/>
-            <a:ext cx="3409950" cy="571500"/>
+          <p:cNvPr id="18" name="Text 16"/>
+          <p:cNvSpPr/>
+          <p:nvPr/>
+        </p:nvSpPr>
+        <p:spPr>
+          <a:xfrm>
+            <a:off x="13601700" y="2667000"/>
+            <a:ext cx="3543300" cy="609600"/>
           </a:xfrm>
           <a:prstGeom prst="rect">
             <a:avLst/>
@@ -5056,48 +4058,92 @@
               <a:buNone/>
             </a:pPr>
             <a:r>
-              <a:rPr lang="en-US" sz="1650" dirty="0" spc="4" kern="0">
-                <a:solidFill>
-                  <a:srgbClr val="9A98A0"/>
-                </a:solidFill>
-                <a:latin typeface="Be Vietnam Pro" pitchFamily="34" charset="0"/>
-                <a:ea typeface="Be Vietnam Pro" pitchFamily="34" charset="-122"/>
-                <a:cs typeface="Be Vietnam Pro" pitchFamily="34" charset="-120"/>
-              </a:rPr>
-              <a:t>Hybrid</a:t>
+              <a:rPr lang="en-US" sz="1650" dirty="0" spc="14" kern="0">
+                <a:solidFill>
+                  <a:srgbClr val="D8D3C4"/>
+                </a:solidFill>
+                <a:latin typeface="Be Vietnam Pro" pitchFamily="34" charset="0"/>
+                <a:ea typeface="Be Vietnam Pro" pitchFamily="34" charset="-122"/>
+                <a:cs typeface="Be Vietnam Pro" pitchFamily="34" charset="-120"/>
+              </a:rPr>
+              <a:t>đệm</a:t>
+            </a:r>
+            <a:r>
+              <a:rPr lang="en-US" sz="1650" dirty="0" spc="-7" kern="0">
+                <a:solidFill>
+                  <a:srgbClr val="D8D3C4"/>
+                </a:solidFill>
+                <a:latin typeface="Be Vietnam Pro" pitchFamily="34" charset="0"/>
+                <a:ea typeface="Be Vietnam Pro" pitchFamily="34" charset="-122"/>
+                <a:cs typeface="Be Vietnam Pro" pitchFamily="34" charset="-120"/>
+              </a:rPr>
+              <a:t> ngẫu</a:t>
             </a:r>
             <a:r>
               <a:rPr lang="en-US" sz="1650" dirty="0" spc="-1" kern="0">
                 <a:solidFill>
-                  <a:srgbClr val="9A98A0"/>
-                </a:solidFill>
-                <a:latin typeface="Be Vietnam Pro" pitchFamily="34" charset="0"/>
-                <a:ea typeface="Be Vietnam Pro" pitchFamily="34" charset="-122"/>
-                <a:cs typeface="Be Vietnam Pro" pitchFamily="34" charset="-120"/>
-              </a:rPr>
-              <a:t> Public</a:t>
-            </a:r>
-            <a:r>
-              <a:rPr lang="en-US" sz="1650" dirty="0" spc="-35" kern="0">
-                <a:solidFill>
-                  <a:srgbClr val="9A98A0"/>
-                </a:solidFill>
-                <a:latin typeface="Be Vietnam Pro" pitchFamily="34" charset="0"/>
-                <a:ea typeface="Be Vietnam Pro" pitchFamily="34" charset="-122"/>
-                <a:cs typeface="Be Vietnam Pro" pitchFamily="34" charset="-120"/>
-              </a:rPr>
-              <a:t> Key</a:t>
+                  <a:srgbClr val="D8D3C4"/>
+                </a:solidFill>
+                <a:latin typeface="Be Vietnam Pro" pitchFamily="34" charset="0"/>
+                <a:ea typeface="Be Vietnam Pro" pitchFamily="34" charset="-122"/>
+                <a:cs typeface="Be Vietnam Pro" pitchFamily="34" charset="-120"/>
+              </a:rPr>
+              <a:t> nhiên</a:t>
+            </a:r>
+            <a:r>
+              <a:rPr lang="en-US" sz="1650" dirty="0" spc="6" kern="0">
+                <a:solidFill>
+                  <a:srgbClr val="D8D3C4"/>
+                </a:solidFill>
+                <a:latin typeface="Be Vietnam Pro" pitchFamily="34" charset="0"/>
+                <a:ea typeface="Be Vietnam Pro" pitchFamily="34" charset="-122"/>
+                <a:cs typeface="Be Vietnam Pro" pitchFamily="34" charset="-120"/>
+              </a:rPr>
+              <a:t> trước</a:t>
+            </a:r>
+            <a:r>
+              <a:rPr lang="en-US" sz="1650" dirty="0" spc="1" kern="0">
+                <a:solidFill>
+                  <a:srgbClr val="D8D3C4"/>
+                </a:solidFill>
+                <a:latin typeface="Be Vietnam Pro" pitchFamily="34" charset="0"/>
+                <a:ea typeface="Be Vietnam Pro" pitchFamily="34" charset="-122"/>
+                <a:cs typeface="Be Vietnam Pro" pitchFamily="34" charset="-120"/>
+              </a:rPr>
+              <a:t> khi</a:t>
+            </a:r>
+            <a:r>
+              <a:rPr lang="en-US" sz="1650" dirty="0" spc="2" kern="0">
+                <a:solidFill>
+                  <a:srgbClr val="D8D3C4"/>
+                </a:solidFill>
+                <a:latin typeface="Be Vietnam Pro" pitchFamily="34" charset="0"/>
+                <a:ea typeface="Be Vietnam Pro" pitchFamily="34" charset="-122"/>
+                <a:cs typeface="Be Vietnam Pro" pitchFamily="34" charset="-120"/>
+              </a:rPr>
+              <a:t> mã</a:t>
             </a:r>
             <a:r>
               <a:rPr lang="en-US" sz="1650" dirty="0" spc="-2" kern="0">
                 <a:solidFill>
-                  <a:srgbClr val="9A98A0"/>
-                </a:solidFill>
-                <a:latin typeface="Be Vietnam Pro" pitchFamily="34" charset="0"/>
-                <a:ea typeface="Be Vietnam Pro" pitchFamily="34" charset="-122"/>
-                <a:cs typeface="Be Vietnam Pro" pitchFamily="34" charset="-120"/>
-              </a:rPr>
-              <a:t> Encryption</a:t>
+                  <a:srgbClr val="D8D3C4"/>
+                </a:solidFill>
+                <a:latin typeface="Be Vietnam Pro" pitchFamily="34" charset="0"/>
+                <a:ea typeface="Be Vietnam Pro" pitchFamily="34" charset="-122"/>
+                <a:cs typeface="Be Vietnam Pro" pitchFamily="34" charset="-120"/>
+              </a:rPr>
+              <a:t> hóa</a:t>
+            </a:r>
+            <a:r>
+              <a:rPr lang="en-US" sz="1650" dirty="0" spc="-11" kern="0">
+                <a:solidFill>
+                  <a:srgbClr val="D8D3C4"/>
+                </a:solidFill>
+                <a:latin typeface="Be Vietnam Pro" pitchFamily="34" charset="0"/>
+                <a:ea typeface="Be Vietnam Pro" pitchFamily="34" charset="-122"/>
+                <a:cs typeface="Be Vietnam Pro" pitchFamily="34" charset="-120"/>
+              </a:rPr>
+              <a:t> RSA</a:t>
             </a:r>
             <a:endParaRPr lang="en-US" sz="1650" dirty="0"/>
           </a:p>
@@ -5105,14 +4151,36 @@
       </p:sp>
       <p:sp>
         <p:nvSpPr>
-          <p:cNvPr id="35" name="Text 33"/>
-          <p:cNvSpPr/>
-          <p:nvPr/>
-        </p:nvSpPr>
-        <p:spPr>
-          <a:xfrm>
-            <a:off x="13696950" y="6534150"/>
-            <a:ext cx="3409950" cy="666750"/>
+          <p:cNvPr id="19" name="Shape 17"/>
+          <p:cNvSpPr/>
+          <p:nvPr/>
+        </p:nvSpPr>
+        <p:spPr>
+          <a:xfrm>
+            <a:off x="914400" y="3562350"/>
+            <a:ext cx="4000500" cy="1962150"/>
+          </a:xfrm>
+          <a:prstGeom prst="roundRect">
+            <a:avLst>
+              <a:gd name="adj" fmla="val 10680"/>
+            </a:avLst>
+          </a:prstGeom>
+          <a:solidFill>
+            <a:srgbClr val="1E212B"/>
+          </a:solidFill>
+          <a:ln/>
+        </p:spPr>
+      </p:sp>
+      <p:sp>
+        <p:nvSpPr>
+          <p:cNvPr id="20" name="Text 18"/>
+          <p:cNvSpPr/>
+          <p:nvPr/>
+        </p:nvSpPr>
+        <p:spPr>
+          <a:xfrm>
+            <a:off x="1143000" y="3714750"/>
+            <a:ext cx="3543300" cy="438150"/>
           </a:xfrm>
           <a:prstGeom prst="rect">
             <a:avLst/>
@@ -5121,116 +4189,1771 @@
           <a:ln/>
         </p:spPr>
         <p:txBody>
-          <a:bodyPr wrap="square" lIns="0" tIns="9716" rIns="0" bIns="-9716" rtlCol="0" anchor="t"/>
+          <a:bodyPr wrap="square" lIns="0" tIns="0" rIns="0" bIns="0" rtlCol="0" anchor="t"/>
+          <a:lstStyle/>
+          <a:p>
+            <a:pPr algn="l" indent="0" marL="0">
+              <a:buNone/>
+            </a:pPr>
+            <a:r>
+              <a:rPr lang="en-US" sz="2550" dirty="0" spc="3" kern="0">
+                <a:solidFill>
+                  <a:srgbClr val="D8D3C4"/>
+                </a:solidFill>
+                <a:latin typeface="Bricolage Grotesque ExtraBold" pitchFamily="34" charset="0"/>
+                <a:ea typeface="Bricolage Grotesque ExtraBold" pitchFamily="34" charset="-122"/>
+                <a:cs typeface="Bricolage Grotesque ExtraBold" pitchFamily="34" charset="-120"/>
+              </a:rPr>
+              <a:t>SHA</a:t>
+            </a:r>
+            <a:endParaRPr lang="en-US" sz="2550" dirty="0"/>
+          </a:p>
+        </p:txBody>
+      </p:sp>
+      <p:sp>
+        <p:nvSpPr>
+          <p:cNvPr id="21" name="Text 19"/>
+          <p:cNvSpPr/>
+          <p:nvPr/>
+        </p:nvSpPr>
+        <p:spPr>
+          <a:xfrm>
+            <a:off x="1143000" y="4171950"/>
+            <a:ext cx="3543300" cy="571500"/>
+          </a:xfrm>
+          <a:prstGeom prst="rect">
+            <a:avLst/>
+          </a:prstGeom>
+          <a:noFill/>
+          <a:ln/>
+        </p:spPr>
+        <p:txBody>
+          <a:bodyPr wrap="square" lIns="0" tIns="8906" rIns="0" bIns="-8906" rtlCol="0" anchor="t"/>
           <a:lstStyle/>
           <a:p>
             <a:pPr algn="l" indent="0" marL="0">
               <a:lnSpc>
-                <a:spcPts val="2340"/>
+                <a:spcPts val="2145"/>
               </a:lnSpc>
               <a:buNone/>
             </a:pPr>
             <a:r>
-              <a:rPr lang="en-US" sz="1800" dirty="0" spc="-2" kern="0">
-                <a:solidFill>
-                  <a:srgbClr val="D8D3C4"/>
-                </a:solidFill>
-                <a:latin typeface="Be Vietnam Pro" pitchFamily="34" charset="0"/>
-                <a:ea typeface="Be Vietnam Pro" pitchFamily="34" charset="-122"/>
-                <a:cs typeface="Be Vietnam Pro" pitchFamily="34" charset="-120"/>
-              </a:rPr>
-              <a:t>chuẩn</a:t>
-            </a:r>
-            <a:r>
-              <a:rPr lang="en-US" sz="1800" dirty="0" spc="1" kern="0">
-                <a:solidFill>
-                  <a:srgbClr val="D8D3C4"/>
-                </a:solidFill>
-                <a:latin typeface="Be Vietnam Pro" pitchFamily="34" charset="0"/>
-                <a:ea typeface="Be Vietnam Pro" pitchFamily="34" charset="-122"/>
-                <a:cs typeface="Be Vietnam Pro" pitchFamily="34" charset="-120"/>
-              </a:rPr>
-              <a:t> lai</a:t>
-            </a:r>
-            <a:r>
-              <a:rPr lang="en-US" sz="1800" dirty="0" spc="-10" kern="0">
-                <a:solidFill>
-                  <a:srgbClr val="D8D3C4"/>
-                </a:solidFill>
-                <a:latin typeface="Be Vietnam Pro" pitchFamily="34" charset="0"/>
-                <a:ea typeface="Be Vietnam Pro" pitchFamily="34" charset="-122"/>
-                <a:cs typeface="Be Vietnam Pro" pitchFamily="34" charset="-120"/>
-              </a:rPr>
-              <a:t> gói</a:t>
-            </a:r>
-            <a:r>
-              <a:rPr lang="en-US" sz="1800" dirty="0" spc="-5" kern="0">
-                <a:solidFill>
-                  <a:srgbClr val="D8D3C4"/>
-                </a:solidFill>
-                <a:latin typeface="Be Vietnam Pro" pitchFamily="34" charset="0"/>
-                <a:ea typeface="Be Vietnam Pro" pitchFamily="34" charset="-122"/>
-                <a:cs typeface="Be Vietnam Pro" pitchFamily="34" charset="-120"/>
-              </a:rPr>
-              <a:t> sẵn</a:t>
-            </a:r>
-            <a:r>
-              <a:rPr lang="en-US" sz="1800" dirty="0" spc="-2" kern="0">
-                <a:solidFill>
-                  <a:srgbClr val="D8D3C4"/>
-                </a:solidFill>
-                <a:latin typeface="Be Vietnam Pro" pitchFamily="34" charset="0"/>
-                <a:ea typeface="Be Vietnam Pro" pitchFamily="34" charset="-122"/>
-                <a:cs typeface="Be Vietnam Pro" pitchFamily="34" charset="-120"/>
-              </a:rPr>
-              <a:t> việc</a:t>
-            </a:r>
-            <a:r>
-              <a:rPr lang="en-US" sz="1800" dirty="0" spc="-3" kern="0">
-                <a:solidFill>
-                  <a:srgbClr val="D8D3C4"/>
-                </a:solidFill>
-                <a:latin typeface="Be Vietnam Pro" pitchFamily="34" charset="0"/>
-                <a:ea typeface="Be Vietnam Pro" pitchFamily="34" charset="-122"/>
-                <a:cs typeface="Be Vietnam Pro" pitchFamily="34" charset="-120"/>
-              </a:rPr>
-              <a:t> thống</a:t>
-            </a:r>
-            <a:r>
-              <a:rPr lang="en-US" sz="1800" dirty="0" spc="-9" kern="0">
-                <a:solidFill>
-                  <a:srgbClr val="D8D3C4"/>
-                </a:solidFill>
-                <a:latin typeface="Be Vietnam Pro" pitchFamily="34" charset="0"/>
-                <a:ea typeface="Be Vietnam Pro" pitchFamily="34" charset="-122"/>
-                <a:cs typeface="Be Vietnam Pro" pitchFamily="34" charset="-120"/>
-              </a:rPr>
-              <a:t> nhất</a:t>
-            </a:r>
-            <a:r>
-              <a:rPr lang="en-US" sz="1800" dirty="0" spc="0" kern="0">
-                <a:solidFill>
-                  <a:srgbClr val="D8D3C4"/>
-                </a:solidFill>
-                <a:latin typeface="Be Vietnam Pro" pitchFamily="34" charset="0"/>
-                <a:ea typeface="Be Vietnam Pro" pitchFamily="34" charset="-122"/>
-                <a:cs typeface="Be Vietnam Pro" pitchFamily="34" charset="-120"/>
-              </a:rPr>
-              <a:t> khóa</a:t>
-            </a:r>
-            <a:endParaRPr lang="en-US" sz="1800" dirty="0"/>
+              <a:rPr lang="en-US" sz="1650" dirty="0" spc="-14" kern="0">
+                <a:solidFill>
+                  <a:srgbClr val="9A98A0"/>
+                </a:solidFill>
+                <a:latin typeface="Be Vietnam Pro" pitchFamily="34" charset="0"/>
+                <a:ea typeface="Be Vietnam Pro" pitchFamily="34" charset="-122"/>
+                <a:cs typeface="Be Vietnam Pro" pitchFamily="34" charset="-120"/>
+              </a:rPr>
+              <a:t>Secure</a:t>
+            </a:r>
+            <a:r>
+              <a:rPr lang="en-US" sz="1650" dirty="0" spc="0" kern="0">
+                <a:solidFill>
+                  <a:srgbClr val="9A98A0"/>
+                </a:solidFill>
+                <a:latin typeface="Be Vietnam Pro" pitchFamily="34" charset="0"/>
+                <a:ea typeface="Be Vietnam Pro" pitchFamily="34" charset="-122"/>
+                <a:cs typeface="Be Vietnam Pro" pitchFamily="34" charset="-120"/>
+              </a:rPr>
+              <a:t> Hash</a:t>
+            </a:r>
+            <a:r>
+              <a:rPr lang="en-US" sz="1650" dirty="0" spc="-1" kern="0">
+                <a:solidFill>
+                  <a:srgbClr val="9A98A0"/>
+                </a:solidFill>
+                <a:latin typeface="Be Vietnam Pro" pitchFamily="34" charset="0"/>
+                <a:ea typeface="Be Vietnam Pro" pitchFamily="34" charset="-122"/>
+                <a:cs typeface="Be Vietnam Pro" pitchFamily="34" charset="-120"/>
+              </a:rPr>
+              <a:t> Algorithm</a:t>
+            </a:r>
+            <a:endParaRPr lang="en-US" sz="1650" dirty="0"/>
           </a:p>
         </p:txBody>
       </p:sp>
       <p:sp>
         <p:nvSpPr>
-          <p:cNvPr id="36" name="Connector line-1792334746659-349630117"/>
-          <p:cNvSpPr/>
-          <p:nvPr/>
-        </p:nvSpPr>
-        <p:spPr>
-          <a:xfrm>
-            <a:off x="914400" y="7620000"/>
+          <p:cNvPr id="22" name="Text 20"/>
+          <p:cNvSpPr/>
+          <p:nvPr/>
+        </p:nvSpPr>
+        <p:spPr>
+          <a:xfrm>
+            <a:off x="1143000" y="4781550"/>
+            <a:ext cx="3543300" cy="609600"/>
+          </a:xfrm>
+          <a:prstGeom prst="rect">
+            <a:avLst/>
+          </a:prstGeom>
+          <a:noFill/>
+          <a:ln/>
+        </p:spPr>
+        <p:txBody>
+          <a:bodyPr wrap="square" lIns="0" tIns="8906" rIns="0" bIns="-8906" rtlCol="0" anchor="t"/>
+          <a:lstStyle/>
+          <a:p>
+            <a:pPr algn="l" indent="0" marL="0">
+              <a:lnSpc>
+                <a:spcPts val="2145"/>
+              </a:lnSpc>
+              <a:buNone/>
+            </a:pPr>
+            <a:r>
+              <a:rPr lang="en-US" sz="1650" dirty="0" spc="0" kern="0">
+                <a:solidFill>
+                  <a:srgbClr val="D8D3C4"/>
+                </a:solidFill>
+                <a:latin typeface="Be Vietnam Pro" pitchFamily="34" charset="0"/>
+                <a:ea typeface="Be Vietnam Pro" pitchFamily="34" charset="-122"/>
+                <a:cs typeface="Be Vietnam Pro" pitchFamily="34" charset="-120"/>
+              </a:rPr>
+              <a:t>họ</a:t>
+            </a:r>
+            <a:r>
+              <a:rPr lang="en-US" sz="1650" dirty="0" spc="-3" kern="0">
+                <a:solidFill>
+                  <a:srgbClr val="D8D3C4"/>
+                </a:solidFill>
+                <a:latin typeface="Be Vietnam Pro" pitchFamily="34" charset="0"/>
+                <a:ea typeface="Be Vietnam Pro" pitchFamily="34" charset="-122"/>
+                <a:cs typeface="Be Vietnam Pro" pitchFamily="34" charset="-120"/>
+              </a:rPr>
+              <a:t> thuật</a:t>
+            </a:r>
+            <a:r>
+              <a:rPr lang="en-US" sz="1650" dirty="0" spc="-7" kern="0">
+                <a:solidFill>
+                  <a:srgbClr val="D8D3C4"/>
+                </a:solidFill>
+                <a:latin typeface="Be Vietnam Pro" pitchFamily="34" charset="0"/>
+                <a:ea typeface="Be Vietnam Pro" pitchFamily="34" charset="-122"/>
+                <a:cs typeface="Be Vietnam Pro" pitchFamily="34" charset="-120"/>
+              </a:rPr>
+              <a:t> toán</a:t>
+            </a:r>
+            <a:r>
+              <a:rPr lang="en-US" sz="1650" dirty="0" spc="-1" kern="0">
+                <a:solidFill>
+                  <a:srgbClr val="D8D3C4"/>
+                </a:solidFill>
+                <a:latin typeface="Be Vietnam Pro" pitchFamily="34" charset="0"/>
+                <a:ea typeface="Be Vietnam Pro" pitchFamily="34" charset="-122"/>
+                <a:cs typeface="Be Vietnam Pro" pitchFamily="34" charset="-120"/>
+              </a:rPr>
+              <a:t> băm,</a:t>
+            </a:r>
+            <a:r>
+              <a:rPr lang="en-US" sz="1650" dirty="0" spc="0" kern="0">
+                <a:solidFill>
+                  <a:srgbClr val="D8D3C4"/>
+                </a:solidFill>
+                <a:latin typeface="Be Vietnam Pro" pitchFamily="34" charset="0"/>
+                <a:ea typeface="Be Vietnam Pro" pitchFamily="34" charset="-122"/>
+                <a:cs typeface="Be Vietnam Pro" pitchFamily="34" charset="-120"/>
+              </a:rPr>
+              <a:t> dùng bên</a:t>
+            </a:r>
+            <a:r>
+              <a:rPr lang="en-US" sz="1650" dirty="0" spc="-11" kern="0">
+                <a:solidFill>
+                  <a:srgbClr val="D8D3C4"/>
+                </a:solidFill>
+                <a:latin typeface="Be Vietnam Pro" pitchFamily="34" charset="0"/>
+                <a:ea typeface="Be Vietnam Pro" pitchFamily="34" charset="-122"/>
+                <a:cs typeface="Be Vietnam Pro" pitchFamily="34" charset="-120"/>
+              </a:rPr>
+              <a:t> trong</a:t>
+            </a:r>
+            <a:r>
+              <a:rPr lang="en-US" sz="1650" dirty="0" spc="-13" kern="0">
+                <a:solidFill>
+                  <a:srgbClr val="D8D3C4"/>
+                </a:solidFill>
+                <a:latin typeface="Be Vietnam Pro" pitchFamily="34" charset="0"/>
+                <a:ea typeface="Be Vietnam Pro" pitchFamily="34" charset="-122"/>
+                <a:cs typeface="Be Vietnam Pro" pitchFamily="34" charset="-120"/>
+              </a:rPr>
+              <a:t> OAEP</a:t>
+            </a:r>
+            <a:endParaRPr lang="en-US" sz="1650" dirty="0"/>
+          </a:p>
+        </p:txBody>
+      </p:sp>
+      <p:sp>
+        <p:nvSpPr>
+          <p:cNvPr id="23" name="Shape 21"/>
+          <p:cNvSpPr/>
+          <p:nvPr/>
+        </p:nvSpPr>
+        <p:spPr>
+          <a:xfrm>
+            <a:off x="5067300" y="3562350"/>
+            <a:ext cx="4000500" cy="1962150"/>
+          </a:xfrm>
+          <a:prstGeom prst="roundRect">
+            <a:avLst>
+              <a:gd name="adj" fmla="val 10680"/>
+            </a:avLst>
+          </a:prstGeom>
+          <a:solidFill>
+            <a:srgbClr val="1E212B"/>
+          </a:solidFill>
+          <a:ln/>
+        </p:spPr>
+      </p:sp>
+      <p:sp>
+        <p:nvSpPr>
+          <p:cNvPr id="24" name="Text 22"/>
+          <p:cNvSpPr/>
+          <p:nvPr/>
+        </p:nvSpPr>
+        <p:spPr>
+          <a:xfrm>
+            <a:off x="5295900" y="3714750"/>
+            <a:ext cx="3543300" cy="438150"/>
+          </a:xfrm>
+          <a:prstGeom prst="rect">
+            <a:avLst/>
+          </a:prstGeom>
+          <a:noFill/>
+          <a:ln/>
+        </p:spPr>
+        <p:txBody>
+          <a:bodyPr wrap="square" lIns="0" tIns="0" rIns="0" bIns="0" rtlCol="0" anchor="t"/>
+          <a:lstStyle/>
+          <a:p>
+            <a:pPr algn="l" indent="0" marL="0">
+              <a:buNone/>
+            </a:pPr>
+            <a:r>
+              <a:rPr lang="en-US" sz="2550" dirty="0" spc="2" kern="0">
+                <a:solidFill>
+                  <a:srgbClr val="3DD6A0"/>
+                </a:solidFill>
+                <a:latin typeface="Bricolage Grotesque ExtraBold" pitchFamily="34" charset="0"/>
+                <a:ea typeface="Bricolage Grotesque ExtraBold" pitchFamily="34" charset="-122"/>
+                <a:cs typeface="Bricolage Grotesque ExtraBold" pitchFamily="34" charset="-120"/>
+              </a:rPr>
+              <a:t>TLS</a:t>
+            </a:r>
+            <a:endParaRPr lang="en-US" sz="2550" dirty="0"/>
+          </a:p>
+        </p:txBody>
+      </p:sp>
+      <p:sp>
+        <p:nvSpPr>
+          <p:cNvPr id="25" name="Text 23"/>
+          <p:cNvSpPr/>
+          <p:nvPr/>
+        </p:nvSpPr>
+        <p:spPr>
+          <a:xfrm>
+            <a:off x="5295900" y="4171950"/>
+            <a:ext cx="3543300" cy="571500"/>
+          </a:xfrm>
+          <a:prstGeom prst="rect">
+            <a:avLst/>
+          </a:prstGeom>
+          <a:noFill/>
+          <a:ln/>
+        </p:spPr>
+        <p:txBody>
+          <a:bodyPr wrap="square" lIns="0" tIns="8906" rIns="0" bIns="-8906" rtlCol="0" anchor="t"/>
+          <a:lstStyle/>
+          <a:p>
+            <a:pPr algn="l" indent="0" marL="0">
+              <a:lnSpc>
+                <a:spcPts val="2145"/>
+              </a:lnSpc>
+              <a:buNone/>
+            </a:pPr>
+            <a:r>
+              <a:rPr lang="en-US" sz="1650" dirty="0" spc="-22" kern="0">
+                <a:solidFill>
+                  <a:srgbClr val="9A98A0"/>
+                </a:solidFill>
+                <a:latin typeface="Be Vietnam Pro" pitchFamily="34" charset="0"/>
+                <a:ea typeface="Be Vietnam Pro" pitchFamily="34" charset="-122"/>
+                <a:cs typeface="Be Vietnam Pro" pitchFamily="34" charset="-120"/>
+              </a:rPr>
+              <a:t>Transport</a:t>
+            </a:r>
+            <a:r>
+              <a:rPr lang="en-US" sz="1650" dirty="0" spc="-25" kern="0">
+                <a:solidFill>
+                  <a:srgbClr val="9A98A0"/>
+                </a:solidFill>
+                <a:latin typeface="Be Vietnam Pro" pitchFamily="34" charset="0"/>
+                <a:ea typeface="Be Vietnam Pro" pitchFamily="34" charset="-122"/>
+                <a:cs typeface="Be Vietnam Pro" pitchFamily="34" charset="-120"/>
+              </a:rPr>
+              <a:t> Layer</a:t>
+            </a:r>
+            <a:r>
+              <a:rPr lang="en-US" sz="1650" dirty="0" spc="1" kern="0">
+                <a:solidFill>
+                  <a:srgbClr val="9A98A0"/>
+                </a:solidFill>
+                <a:latin typeface="Be Vietnam Pro" pitchFamily="34" charset="0"/>
+                <a:ea typeface="Be Vietnam Pro" pitchFamily="34" charset="-122"/>
+                <a:cs typeface="Be Vietnam Pro" pitchFamily="34" charset="-120"/>
+              </a:rPr>
+              <a:t> Security</a:t>
+            </a:r>
+            <a:endParaRPr lang="en-US" sz="1650" dirty="0"/>
+          </a:p>
+        </p:txBody>
+      </p:sp>
+      <p:sp>
+        <p:nvSpPr>
+          <p:cNvPr id="26" name="Text 24"/>
+          <p:cNvSpPr/>
+          <p:nvPr/>
+        </p:nvSpPr>
+        <p:spPr>
+          <a:xfrm>
+            <a:off x="5295900" y="4781550"/>
+            <a:ext cx="3543300" cy="609600"/>
+          </a:xfrm>
+          <a:prstGeom prst="rect">
+            <a:avLst/>
+          </a:prstGeom>
+          <a:noFill/>
+          <a:ln/>
+        </p:spPr>
+        <p:txBody>
+          <a:bodyPr wrap="square" lIns="0" tIns="8906" rIns="0" bIns="-8906" rtlCol="0" anchor="t"/>
+          <a:lstStyle/>
+          <a:p>
+            <a:pPr algn="l" indent="0" marL="0">
+              <a:lnSpc>
+                <a:spcPts val="2145"/>
+              </a:lnSpc>
+              <a:buNone/>
+            </a:pPr>
+            <a:r>
+              <a:rPr lang="en-US" sz="1650" dirty="0" spc="-2" kern="0">
+                <a:solidFill>
+                  <a:srgbClr val="D8D3C4"/>
+                </a:solidFill>
+                <a:latin typeface="Be Vietnam Pro" pitchFamily="34" charset="0"/>
+                <a:ea typeface="Be Vietnam Pro" pitchFamily="34" charset="-122"/>
+                <a:cs typeface="Be Vietnam Pro" pitchFamily="34" charset="-120"/>
+              </a:rPr>
+              <a:t>giao</a:t>
+            </a:r>
+            <a:r>
+              <a:rPr lang="en-US" sz="1650" dirty="0" spc="6" kern="0">
+                <a:solidFill>
+                  <a:srgbClr val="D8D3C4"/>
+                </a:solidFill>
+                <a:latin typeface="Be Vietnam Pro" pitchFamily="34" charset="0"/>
+                <a:ea typeface="Be Vietnam Pro" pitchFamily="34" charset="-122"/>
+                <a:cs typeface="Be Vietnam Pro" pitchFamily="34" charset="-120"/>
+              </a:rPr>
+              <a:t> thức</a:t>
+            </a:r>
+            <a:r>
+              <a:rPr lang="en-US" sz="1650" dirty="0" spc="-6" kern="0">
+                <a:solidFill>
+                  <a:srgbClr val="D8D3C4"/>
+                </a:solidFill>
+                <a:latin typeface="Be Vietnam Pro" pitchFamily="34" charset="0"/>
+                <a:ea typeface="Be Vietnam Pro" pitchFamily="34" charset="-122"/>
+                <a:cs typeface="Be Vietnam Pro" pitchFamily="34" charset="-120"/>
+              </a:rPr>
+              <a:t> bắt</a:t>
+            </a:r>
+            <a:r>
+              <a:rPr lang="en-US" sz="1650" dirty="0" spc="-10" kern="0">
+                <a:solidFill>
+                  <a:srgbClr val="D8D3C4"/>
+                </a:solidFill>
+                <a:latin typeface="Be Vietnam Pro" pitchFamily="34" charset="0"/>
+                <a:ea typeface="Be Vietnam Pro" pitchFamily="34" charset="-122"/>
+                <a:cs typeface="Be Vietnam Pro" pitchFamily="34" charset="-120"/>
+              </a:rPr>
+              <a:t> tay,</a:t>
+            </a:r>
+            <a:r>
+              <a:rPr lang="en-US" sz="1650" dirty="0" spc="0" kern="0">
+                <a:solidFill>
+                  <a:srgbClr val="D8D3C4"/>
+                </a:solidFill>
+                <a:latin typeface="Be Vietnam Pro" pitchFamily="34" charset="0"/>
+                <a:ea typeface="Be Vietnam Pro" pitchFamily="34" charset="-122"/>
+                <a:cs typeface="Be Vietnam Pro" pitchFamily="34" charset="-120"/>
+              </a:rPr>
+              <a:t> thống</a:t>
+            </a:r>
+            <a:r>
+              <a:rPr lang="en-US" sz="1650" dirty="0" spc="-4" kern="0">
+                <a:solidFill>
+                  <a:srgbClr val="D8D3C4"/>
+                </a:solidFill>
+                <a:latin typeface="Be Vietnam Pro" pitchFamily="34" charset="0"/>
+                <a:ea typeface="Be Vietnam Pro" pitchFamily="34" charset="-122"/>
+                <a:cs typeface="Be Vietnam Pro" pitchFamily="34" charset="-120"/>
+              </a:rPr>
+              <a:t> nhất</a:t>
+            </a:r>
+            <a:r>
+              <a:rPr lang="en-US" sz="1650" dirty="0" spc="-1" kern="0">
+                <a:solidFill>
+                  <a:srgbClr val="D8D3C4"/>
+                </a:solidFill>
+                <a:latin typeface="Be Vietnam Pro" pitchFamily="34" charset="0"/>
+                <a:ea typeface="Be Vietnam Pro" pitchFamily="34" charset="-122"/>
+                <a:cs typeface="Be Vietnam Pro" pitchFamily="34" charset="-120"/>
+              </a:rPr>
+              <a:t> khóa</a:t>
+            </a:r>
+            <a:r>
+              <a:rPr lang="en-US" sz="1650" dirty="0" spc="-17" kern="0">
+                <a:solidFill>
+                  <a:srgbClr val="D8D3C4"/>
+                </a:solidFill>
+                <a:latin typeface="Be Vietnam Pro" pitchFamily="34" charset="0"/>
+                <a:ea typeface="Be Vietnam Pro" pitchFamily="34" charset="-122"/>
+                <a:cs typeface="Be Vietnam Pro" pitchFamily="34" charset="-120"/>
+              </a:rPr>
+              <a:t> rồi</a:t>
+            </a:r>
+            <a:r>
+              <a:rPr lang="en-US" sz="1650" dirty="0" spc="2" kern="0">
+                <a:solidFill>
+                  <a:srgbClr val="D8D3C4"/>
+                </a:solidFill>
+                <a:latin typeface="Be Vietnam Pro" pitchFamily="34" charset="0"/>
+                <a:ea typeface="Be Vietnam Pro" pitchFamily="34" charset="-122"/>
+                <a:cs typeface="Be Vietnam Pro" pitchFamily="34" charset="-120"/>
+              </a:rPr>
+              <a:t> mã</a:t>
+            </a:r>
+            <a:r>
+              <a:rPr lang="en-US" sz="1650" dirty="0" spc="-1" kern="0">
+                <a:solidFill>
+                  <a:srgbClr val="D8D3C4"/>
+                </a:solidFill>
+                <a:latin typeface="Be Vietnam Pro" pitchFamily="34" charset="0"/>
+                <a:ea typeface="Be Vietnam Pro" pitchFamily="34" charset="-122"/>
+                <a:cs typeface="Be Vietnam Pro" pitchFamily="34" charset="-120"/>
+              </a:rPr>
+              <a:t> hóa</a:t>
+            </a:r>
+            <a:endParaRPr lang="en-US" sz="1650" dirty="0"/>
+          </a:p>
+        </p:txBody>
+      </p:sp>
+      <p:sp>
+        <p:nvSpPr>
+          <p:cNvPr id="27" name="Shape 25"/>
+          <p:cNvSpPr/>
+          <p:nvPr/>
+        </p:nvSpPr>
+        <p:spPr>
+          <a:xfrm>
+            <a:off x="9220200" y="3562350"/>
+            <a:ext cx="4000500" cy="1962150"/>
+          </a:xfrm>
+          <a:prstGeom prst="roundRect">
+            <a:avLst>
+              <a:gd name="adj" fmla="val 10680"/>
+            </a:avLst>
+          </a:prstGeom>
+          <a:solidFill>
+            <a:srgbClr val="1E212B"/>
+          </a:solidFill>
+          <a:ln/>
+        </p:spPr>
+      </p:sp>
+      <p:sp>
+        <p:nvSpPr>
+          <p:cNvPr id="28" name="Text 26"/>
+          <p:cNvSpPr/>
+          <p:nvPr/>
+        </p:nvSpPr>
+        <p:spPr>
+          <a:xfrm>
+            <a:off x="9448800" y="3714750"/>
+            <a:ext cx="3543300" cy="438150"/>
+          </a:xfrm>
+          <a:prstGeom prst="rect">
+            <a:avLst/>
+          </a:prstGeom>
+          <a:noFill/>
+          <a:ln/>
+        </p:spPr>
+        <p:txBody>
+          <a:bodyPr wrap="square" lIns="0" tIns="0" rIns="0" bIns="0" rtlCol="0" anchor="t"/>
+          <a:lstStyle/>
+          <a:p>
+            <a:pPr algn="l" indent="0" marL="0">
+              <a:buNone/>
+            </a:pPr>
+            <a:r>
+              <a:rPr lang="en-US" sz="2550" dirty="0" spc="10" kern="0">
+                <a:solidFill>
+                  <a:srgbClr val="3DD6A0"/>
+                </a:solidFill>
+                <a:latin typeface="Bricolage Grotesque ExtraBold" pitchFamily="34" charset="0"/>
+                <a:ea typeface="Bricolage Grotesque ExtraBold" pitchFamily="34" charset="-122"/>
+                <a:cs typeface="Bricolage Grotesque ExtraBold" pitchFamily="34" charset="-120"/>
+              </a:rPr>
+              <a:t>HTTPS</a:t>
+            </a:r>
+            <a:endParaRPr lang="en-US" sz="2550" dirty="0"/>
+          </a:p>
+        </p:txBody>
+      </p:sp>
+      <p:sp>
+        <p:nvSpPr>
+          <p:cNvPr id="29" name="Text 27"/>
+          <p:cNvSpPr/>
+          <p:nvPr/>
+        </p:nvSpPr>
+        <p:spPr>
+          <a:xfrm>
+            <a:off x="9448800" y="4171950"/>
+            <a:ext cx="3543300" cy="571500"/>
+          </a:xfrm>
+          <a:prstGeom prst="rect">
+            <a:avLst/>
+          </a:prstGeom>
+          <a:noFill/>
+          <a:ln/>
+        </p:spPr>
+        <p:txBody>
+          <a:bodyPr wrap="square" lIns="0" tIns="8906" rIns="0" bIns="-8906" rtlCol="0" anchor="t"/>
+          <a:lstStyle/>
+          <a:p>
+            <a:pPr algn="l" indent="0" marL="0">
+              <a:lnSpc>
+                <a:spcPts val="2145"/>
+              </a:lnSpc>
+              <a:buNone/>
+            </a:pPr>
+            <a:r>
+              <a:rPr lang="en-US" sz="1650" dirty="0" spc="-31" kern="0">
+                <a:solidFill>
+                  <a:srgbClr val="9A98A0"/>
+                </a:solidFill>
+                <a:latin typeface="Be Vietnam Pro" pitchFamily="34" charset="0"/>
+                <a:ea typeface="Be Vietnam Pro" pitchFamily="34" charset="-122"/>
+                <a:cs typeface="Be Vietnam Pro" pitchFamily="34" charset="-120"/>
+              </a:rPr>
+              <a:t>HyperText</a:t>
+            </a:r>
+            <a:r>
+              <a:rPr lang="en-US" sz="1650" dirty="0" spc="-27" kern="0">
+                <a:solidFill>
+                  <a:srgbClr val="9A98A0"/>
+                </a:solidFill>
+                <a:latin typeface="Be Vietnam Pro" pitchFamily="34" charset="0"/>
+                <a:ea typeface="Be Vietnam Pro" pitchFamily="34" charset="-122"/>
+                <a:cs typeface="Be Vietnam Pro" pitchFamily="34" charset="-120"/>
+              </a:rPr>
+              <a:t> Transfer</a:t>
+            </a:r>
+            <a:r>
+              <a:rPr lang="en-US" sz="1650" dirty="0" spc="-14" kern="0">
+                <a:solidFill>
+                  <a:srgbClr val="9A98A0"/>
+                </a:solidFill>
+                <a:latin typeface="Be Vietnam Pro" pitchFamily="34" charset="0"/>
+                <a:ea typeface="Be Vietnam Pro" pitchFamily="34" charset="-122"/>
+                <a:cs typeface="Be Vietnam Pro" pitchFamily="34" charset="-120"/>
+              </a:rPr>
+              <a:t> Protocol</a:t>
+            </a:r>
+            <a:r>
+              <a:rPr lang="en-US" sz="1650" dirty="0" spc="-12" kern="0">
+                <a:solidFill>
+                  <a:srgbClr val="9A98A0"/>
+                </a:solidFill>
+                <a:latin typeface="Be Vietnam Pro" pitchFamily="34" charset="0"/>
+                <a:ea typeface="Be Vietnam Pro" pitchFamily="34" charset="-122"/>
+                <a:cs typeface="Be Vietnam Pro" pitchFamily="34" charset="-120"/>
+              </a:rPr>
+              <a:t> Secure</a:t>
+            </a:r>
+            <a:endParaRPr lang="en-US" sz="1650" dirty="0"/>
+          </a:p>
+        </p:txBody>
+      </p:sp>
+      <p:sp>
+        <p:nvSpPr>
+          <p:cNvPr id="30" name="Text 28"/>
+          <p:cNvSpPr/>
+          <p:nvPr/>
+        </p:nvSpPr>
+        <p:spPr>
+          <a:xfrm>
+            <a:off x="9448800" y="4781550"/>
+            <a:ext cx="3543300" cy="609600"/>
+          </a:xfrm>
+          <a:prstGeom prst="rect">
+            <a:avLst/>
+          </a:prstGeom>
+          <a:noFill/>
+          <a:ln/>
+        </p:spPr>
+        <p:txBody>
+          <a:bodyPr wrap="square" lIns="0" tIns="8906" rIns="0" bIns="-8906" rtlCol="0" anchor="t"/>
+          <a:lstStyle/>
+          <a:p>
+            <a:pPr algn="l" indent="0" marL="0">
+              <a:lnSpc>
+                <a:spcPts val="2145"/>
+              </a:lnSpc>
+              <a:buNone/>
+            </a:pPr>
+            <a:r>
+              <a:rPr lang="en-US" sz="1650" dirty="0" spc="-11" kern="0">
+                <a:solidFill>
+                  <a:srgbClr val="D8D3C4"/>
+                </a:solidFill>
+                <a:latin typeface="Be Vietnam Pro" pitchFamily="34" charset="0"/>
+                <a:ea typeface="Be Vietnam Pro" pitchFamily="34" charset="-122"/>
+                <a:cs typeface="Be Vietnam Pro" pitchFamily="34" charset="-120"/>
+              </a:rPr>
+              <a:t>web</a:t>
+            </a:r>
+            <a:r>
+              <a:rPr lang="en-US" sz="1650" dirty="0" spc="0" kern="0">
+                <a:solidFill>
+                  <a:srgbClr val="D8D3C4"/>
+                </a:solidFill>
+                <a:latin typeface="Be Vietnam Pro" pitchFamily="34" charset="0"/>
+                <a:ea typeface="Be Vietnam Pro" pitchFamily="34" charset="-122"/>
+                <a:cs typeface="Be Vietnam Pro" pitchFamily="34" charset="-120"/>
+              </a:rPr>
+              <a:t> qua</a:t>
+            </a:r>
+            <a:r>
+              <a:rPr lang="en-US" sz="1650" dirty="0" spc="-18" kern="0">
+                <a:solidFill>
+                  <a:srgbClr val="D8D3C4"/>
+                </a:solidFill>
+                <a:latin typeface="Be Vietnam Pro" pitchFamily="34" charset="0"/>
+                <a:ea typeface="Be Vietnam Pro" pitchFamily="34" charset="-122"/>
+                <a:cs typeface="Be Vietnam Pro" pitchFamily="34" charset="-120"/>
+              </a:rPr>
+              <a:t> kết</a:t>
+            </a:r>
+            <a:r>
+              <a:rPr lang="en-US" sz="1650" dirty="0" spc="-1" kern="0">
+                <a:solidFill>
+                  <a:srgbClr val="D8D3C4"/>
+                </a:solidFill>
+                <a:latin typeface="Be Vietnam Pro" pitchFamily="34" charset="0"/>
+                <a:ea typeface="Be Vietnam Pro" pitchFamily="34" charset="-122"/>
+                <a:cs typeface="Be Vietnam Pro" pitchFamily="34" charset="-120"/>
+              </a:rPr>
+              <a:t> nối</a:t>
+            </a:r>
+            <a:r>
+              <a:rPr lang="en-US" sz="1650" dirty="0" spc="7" kern="0">
+                <a:solidFill>
+                  <a:srgbClr val="D8D3C4"/>
+                </a:solidFill>
+                <a:latin typeface="Be Vietnam Pro" pitchFamily="34" charset="0"/>
+                <a:ea typeface="Be Vietnam Pro" pitchFamily="34" charset="-122"/>
+                <a:cs typeface="Be Vietnam Pro" pitchFamily="34" charset="-120"/>
+              </a:rPr>
+              <a:t> được</a:t>
+            </a:r>
+            <a:r>
+              <a:rPr lang="en-US" sz="1650" dirty="0" spc="-1" kern="0">
+                <a:solidFill>
+                  <a:srgbClr val="D8D3C4"/>
+                </a:solidFill>
+                <a:latin typeface="Be Vietnam Pro" pitchFamily="34" charset="0"/>
+                <a:ea typeface="Be Vietnam Pro" pitchFamily="34" charset="-122"/>
+                <a:cs typeface="Be Vietnam Pro" pitchFamily="34" charset="-120"/>
+              </a:rPr>
+              <a:t> bảo</a:t>
+            </a:r>
+            <a:r>
+              <a:rPr lang="en-US" sz="1650" dirty="0" spc="-8" kern="0">
+                <a:solidFill>
+                  <a:srgbClr val="D8D3C4"/>
+                </a:solidFill>
+                <a:latin typeface="Be Vietnam Pro" pitchFamily="34" charset="0"/>
+                <a:ea typeface="Be Vietnam Pro" pitchFamily="34" charset="-122"/>
+                <a:cs typeface="Be Vietnam Pro" pitchFamily="34" charset="-120"/>
+              </a:rPr>
+              <a:t> vệ</a:t>
+            </a:r>
+            <a:r>
+              <a:rPr lang="en-US" sz="1650" dirty="0" spc="-1" kern="0">
+                <a:solidFill>
+                  <a:srgbClr val="D8D3C4"/>
+                </a:solidFill>
+                <a:latin typeface="Be Vietnam Pro" pitchFamily="34" charset="0"/>
+                <a:ea typeface="Be Vietnam Pro" pitchFamily="34" charset="-122"/>
+                <a:cs typeface="Be Vietnam Pro" pitchFamily="34" charset="-120"/>
+              </a:rPr>
+              <a:t> bằng</a:t>
+            </a:r>
+            <a:r>
+              <a:rPr lang="en-US" sz="1650" dirty="0" spc="1" kern="0">
+                <a:solidFill>
+                  <a:srgbClr val="D8D3C4"/>
+                </a:solidFill>
+                <a:latin typeface="Be Vietnam Pro" pitchFamily="34" charset="0"/>
+                <a:ea typeface="Be Vietnam Pro" pitchFamily="34" charset="-122"/>
+                <a:cs typeface="Be Vietnam Pro" pitchFamily="34" charset="-120"/>
+              </a:rPr>
+              <a:t> TLS</a:t>
+            </a:r>
+            <a:endParaRPr lang="en-US" sz="1650" dirty="0"/>
+          </a:p>
+        </p:txBody>
+      </p:sp>
+      <p:sp>
+        <p:nvSpPr>
+          <p:cNvPr id="31" name="Shape 29"/>
+          <p:cNvSpPr/>
+          <p:nvPr/>
+        </p:nvSpPr>
+        <p:spPr>
+          <a:xfrm>
+            <a:off x="13373100" y="3562350"/>
+            <a:ext cx="4000500" cy="1962150"/>
+          </a:xfrm>
+          <a:prstGeom prst="roundRect">
+            <a:avLst>
+              <a:gd name="adj" fmla="val 10680"/>
+            </a:avLst>
+          </a:prstGeom>
+          <a:solidFill>
+            <a:srgbClr val="1E212B"/>
+          </a:solidFill>
+          <a:ln/>
+        </p:spPr>
+      </p:sp>
+      <p:sp>
+        <p:nvSpPr>
+          <p:cNvPr id="32" name="Text 30"/>
+          <p:cNvSpPr/>
+          <p:nvPr/>
+        </p:nvSpPr>
+        <p:spPr>
+          <a:xfrm>
+            <a:off x="13601700" y="3714750"/>
+            <a:ext cx="3543300" cy="438150"/>
+          </a:xfrm>
+          <a:prstGeom prst="rect">
+            <a:avLst/>
+          </a:prstGeom>
+          <a:noFill/>
+          <a:ln/>
+        </p:spPr>
+        <p:txBody>
+          <a:bodyPr wrap="square" lIns="0" tIns="0" rIns="0" bIns="0" rtlCol="0" anchor="t"/>
+          <a:lstStyle/>
+          <a:p>
+            <a:pPr algn="l" indent="0" marL="0">
+              <a:buNone/>
+            </a:pPr>
+            <a:r>
+              <a:rPr lang="en-US" sz="2550" dirty="0" spc="1" kern="0">
+                <a:solidFill>
+                  <a:srgbClr val="D8D3C4"/>
+                </a:solidFill>
+                <a:latin typeface="Bricolage Grotesque ExtraBold" pitchFamily="34" charset="0"/>
+                <a:ea typeface="Bricolage Grotesque ExtraBold" pitchFamily="34" charset="-122"/>
+                <a:cs typeface="Bricolage Grotesque ExtraBold" pitchFamily="34" charset="-120"/>
+              </a:rPr>
+              <a:t>MiB</a:t>
+            </a:r>
+            <a:endParaRPr lang="en-US" sz="2550" dirty="0"/>
+          </a:p>
+        </p:txBody>
+      </p:sp>
+      <p:sp>
+        <p:nvSpPr>
+          <p:cNvPr id="33" name="Text 31"/>
+          <p:cNvSpPr/>
+          <p:nvPr/>
+        </p:nvSpPr>
+        <p:spPr>
+          <a:xfrm>
+            <a:off x="13601700" y="4171950"/>
+            <a:ext cx="3543300" cy="571500"/>
+          </a:xfrm>
+          <a:prstGeom prst="rect">
+            <a:avLst/>
+          </a:prstGeom>
+          <a:noFill/>
+          <a:ln/>
+        </p:spPr>
+        <p:txBody>
+          <a:bodyPr wrap="square" lIns="0" tIns="8906" rIns="0" bIns="-8906" rtlCol="0" anchor="t"/>
+          <a:lstStyle/>
+          <a:p>
+            <a:pPr algn="l" indent="0" marL="0">
+              <a:lnSpc>
+                <a:spcPts val="2145"/>
+              </a:lnSpc>
+              <a:buNone/>
+            </a:pPr>
+            <a:r>
+              <a:rPr lang="en-US" sz="1650" dirty="0" spc="-7" kern="0">
+                <a:solidFill>
+                  <a:srgbClr val="9A98A0"/>
+                </a:solidFill>
+                <a:latin typeface="Be Vietnam Pro" pitchFamily="34" charset="0"/>
+                <a:ea typeface="Be Vietnam Pro" pitchFamily="34" charset="-122"/>
+                <a:cs typeface="Be Vietnam Pro" pitchFamily="34" charset="-120"/>
+              </a:rPr>
+              <a:t>Mebibyte</a:t>
+            </a:r>
+            <a:endParaRPr lang="en-US" sz="1650" dirty="0"/>
+          </a:p>
+        </p:txBody>
+      </p:sp>
+      <p:sp>
+        <p:nvSpPr>
+          <p:cNvPr id="34" name="Text 32"/>
+          <p:cNvSpPr/>
+          <p:nvPr/>
+        </p:nvSpPr>
+        <p:spPr>
+          <a:xfrm>
+            <a:off x="13601700" y="4781550"/>
+            <a:ext cx="3543300" cy="609600"/>
+          </a:xfrm>
+          <a:prstGeom prst="rect">
+            <a:avLst/>
+          </a:prstGeom>
+          <a:noFill/>
+          <a:ln/>
+        </p:spPr>
+        <p:txBody>
+          <a:bodyPr wrap="square" lIns="0" tIns="8906" rIns="0" bIns="-8906" rtlCol="0" anchor="t"/>
+          <a:lstStyle/>
+          <a:p>
+            <a:pPr algn="l" indent="0" marL="0">
+              <a:lnSpc>
+                <a:spcPts val="2145"/>
+              </a:lnSpc>
+              <a:buNone/>
+            </a:pPr>
+            <a:r>
+              <a:rPr lang="en-US" sz="1650" dirty="0" spc="-7" kern="0">
+                <a:solidFill>
+                  <a:srgbClr val="D8D3C4"/>
+                </a:solidFill>
+                <a:latin typeface="Be Vietnam Pro" pitchFamily="34" charset="0"/>
+                <a:ea typeface="Be Vietnam Pro" pitchFamily="34" charset="-122"/>
+                <a:cs typeface="Be Vietnam Pro" pitchFamily="34" charset="-120"/>
+              </a:rPr>
+              <a:t>1.048.576 byte,</a:t>
+            </a:r>
+            <a:r>
+              <a:rPr lang="en-US" sz="1650" dirty="0" spc="-8" kern="0">
+                <a:solidFill>
+                  <a:srgbClr val="D8D3C4"/>
+                </a:solidFill>
+                <a:latin typeface="Be Vietnam Pro" pitchFamily="34" charset="0"/>
+                <a:ea typeface="Be Vietnam Pro" pitchFamily="34" charset="-122"/>
+                <a:cs typeface="Be Vietnam Pro" pitchFamily="34" charset="-120"/>
+              </a:rPr>
+              <a:t> gần</a:t>
+            </a:r>
+            <a:r>
+              <a:rPr lang="en-US" sz="1650" dirty="0" spc="-1" kern="0">
+                <a:solidFill>
+                  <a:srgbClr val="D8D3C4"/>
+                </a:solidFill>
+                <a:latin typeface="Be Vietnam Pro" pitchFamily="34" charset="0"/>
+                <a:ea typeface="Be Vietnam Pro" pitchFamily="34" charset="-122"/>
+                <a:cs typeface="Be Vietnam Pro" pitchFamily="34" charset="-120"/>
+              </a:rPr>
+              <a:t> bằng</a:t>
+            </a:r>
+            <a:r>
+              <a:rPr lang="en-US" sz="1650" dirty="0" spc="-2" kern="0">
+                <a:solidFill>
+                  <a:srgbClr val="D8D3C4"/>
+                </a:solidFill>
+                <a:latin typeface="Be Vietnam Pro" pitchFamily="34" charset="0"/>
+                <a:ea typeface="Be Vietnam Pro" pitchFamily="34" charset="-122"/>
+                <a:cs typeface="Be Vietnam Pro" pitchFamily="34" charset="-120"/>
+              </a:rPr>
+              <a:t> một</a:t>
+            </a:r>
+            <a:r>
+              <a:rPr lang="en-US" sz="1650" dirty="0" spc="7" kern="0">
+                <a:solidFill>
+                  <a:srgbClr val="D8D3C4"/>
+                </a:solidFill>
+                <a:latin typeface="Be Vietnam Pro" pitchFamily="34" charset="0"/>
+                <a:ea typeface="Be Vietnam Pro" pitchFamily="34" charset="-122"/>
+                <a:cs typeface="Be Vietnam Pro" pitchFamily="34" charset="-120"/>
+              </a:rPr>
+              <a:t> triệu</a:t>
+            </a:r>
+            <a:r>
+              <a:rPr lang="en-US" sz="1650" dirty="0" spc="-10" kern="0">
+                <a:solidFill>
+                  <a:srgbClr val="D8D3C4"/>
+                </a:solidFill>
+                <a:latin typeface="Be Vietnam Pro" pitchFamily="34" charset="0"/>
+                <a:ea typeface="Be Vietnam Pro" pitchFamily="34" charset="-122"/>
+                <a:cs typeface="Be Vietnam Pro" pitchFamily="34" charset="-120"/>
+              </a:rPr>
+              <a:t> byte</a:t>
+            </a:r>
+            <a:endParaRPr lang="en-US" sz="1650" dirty="0"/>
+          </a:p>
+        </p:txBody>
+      </p:sp>
+      <p:sp>
+        <p:nvSpPr>
+          <p:cNvPr id="35" name="Shape 33"/>
+          <p:cNvSpPr/>
+          <p:nvPr/>
+        </p:nvSpPr>
+        <p:spPr>
+          <a:xfrm>
+            <a:off x="914400" y="5676900"/>
+            <a:ext cx="5381625" cy="1962150"/>
+          </a:xfrm>
+          <a:prstGeom prst="roundRect">
+            <a:avLst>
+              <a:gd name="adj" fmla="val 10680"/>
+            </a:avLst>
+          </a:prstGeom>
+          <a:solidFill>
+            <a:srgbClr val="1E212B"/>
+          </a:solidFill>
+          <a:ln/>
+        </p:spPr>
+      </p:sp>
+      <p:sp>
+        <p:nvSpPr>
+          <p:cNvPr id="36" name="Text 34"/>
+          <p:cNvSpPr/>
+          <p:nvPr/>
+        </p:nvSpPr>
+        <p:spPr>
+          <a:xfrm>
+            <a:off x="1143000" y="5829300"/>
+            <a:ext cx="4924425" cy="438150"/>
+          </a:xfrm>
+          <a:prstGeom prst="rect">
+            <a:avLst/>
+          </a:prstGeom>
+          <a:noFill/>
+          <a:ln/>
+        </p:spPr>
+        <p:txBody>
+          <a:bodyPr wrap="square" lIns="0" tIns="0" rIns="0" bIns="0" rtlCol="0" anchor="t"/>
+          <a:lstStyle/>
+          <a:p>
+            <a:pPr algn="l" indent="0" marL="0">
+              <a:buNone/>
+            </a:pPr>
+            <a:r>
+              <a:rPr lang="en-US" sz="2550" dirty="0" spc="-1" kern="0">
+                <a:solidFill>
+                  <a:srgbClr val="3DD6A0"/>
+                </a:solidFill>
+                <a:latin typeface="Bricolage Grotesque ExtraBold" pitchFamily="34" charset="0"/>
+                <a:ea typeface="Bricolage Grotesque ExtraBold" pitchFamily="34" charset="-122"/>
+                <a:cs typeface="Bricolage Grotesque ExtraBold" pitchFamily="34" charset="-120"/>
+              </a:rPr>
+              <a:t>HPKE</a:t>
+            </a:r>
+            <a:endParaRPr lang="en-US" sz="2550" dirty="0"/>
+          </a:p>
+        </p:txBody>
+      </p:sp>
+      <p:sp>
+        <p:nvSpPr>
+          <p:cNvPr id="37" name="Text 35"/>
+          <p:cNvSpPr/>
+          <p:nvPr/>
+        </p:nvSpPr>
+        <p:spPr>
+          <a:xfrm>
+            <a:off x="1143000" y="6286500"/>
+            <a:ext cx="4924425" cy="571500"/>
+          </a:xfrm>
+          <a:prstGeom prst="rect">
+            <a:avLst/>
+          </a:prstGeom>
+          <a:noFill/>
+          <a:ln/>
+        </p:spPr>
+        <p:txBody>
+          <a:bodyPr wrap="square" lIns="0" tIns="8906" rIns="0" bIns="-8906" rtlCol="0" anchor="t"/>
+          <a:lstStyle/>
+          <a:p>
+            <a:pPr algn="l" indent="0" marL="0">
+              <a:lnSpc>
+                <a:spcPts val="2145"/>
+              </a:lnSpc>
+              <a:buNone/>
+            </a:pPr>
+            <a:r>
+              <a:rPr lang="en-US" sz="1650" dirty="0" spc="4" kern="0">
+                <a:solidFill>
+                  <a:srgbClr val="9A98A0"/>
+                </a:solidFill>
+                <a:latin typeface="Be Vietnam Pro" pitchFamily="34" charset="0"/>
+                <a:ea typeface="Be Vietnam Pro" pitchFamily="34" charset="-122"/>
+                <a:cs typeface="Be Vietnam Pro" pitchFamily="34" charset="-120"/>
+              </a:rPr>
+              <a:t>Hybrid</a:t>
+            </a:r>
+            <a:r>
+              <a:rPr lang="en-US" sz="1650" dirty="0" spc="-1" kern="0">
+                <a:solidFill>
+                  <a:srgbClr val="9A98A0"/>
+                </a:solidFill>
+                <a:latin typeface="Be Vietnam Pro" pitchFamily="34" charset="0"/>
+                <a:ea typeface="Be Vietnam Pro" pitchFamily="34" charset="-122"/>
+                <a:cs typeface="Be Vietnam Pro" pitchFamily="34" charset="-120"/>
+              </a:rPr>
+              <a:t> Public</a:t>
+            </a:r>
+            <a:r>
+              <a:rPr lang="en-US" sz="1650" dirty="0" spc="-35" kern="0">
+                <a:solidFill>
+                  <a:srgbClr val="9A98A0"/>
+                </a:solidFill>
+                <a:latin typeface="Be Vietnam Pro" pitchFamily="34" charset="0"/>
+                <a:ea typeface="Be Vietnam Pro" pitchFamily="34" charset="-122"/>
+                <a:cs typeface="Be Vietnam Pro" pitchFamily="34" charset="-120"/>
+              </a:rPr>
+              <a:t> Key</a:t>
+            </a:r>
+            <a:r>
+              <a:rPr lang="en-US" sz="1650" dirty="0" spc="-2" kern="0">
+                <a:solidFill>
+                  <a:srgbClr val="9A98A0"/>
+                </a:solidFill>
+                <a:latin typeface="Be Vietnam Pro" pitchFamily="34" charset="0"/>
+                <a:ea typeface="Be Vietnam Pro" pitchFamily="34" charset="-122"/>
+                <a:cs typeface="Be Vietnam Pro" pitchFamily="34" charset="-120"/>
+              </a:rPr>
+              <a:t> Encryption</a:t>
+            </a:r>
+            <a:endParaRPr lang="en-US" sz="1650" dirty="0"/>
+          </a:p>
+        </p:txBody>
+      </p:sp>
+      <p:sp>
+        <p:nvSpPr>
+          <p:cNvPr id="38" name="Text 36"/>
+          <p:cNvSpPr/>
+          <p:nvPr/>
+        </p:nvSpPr>
+        <p:spPr>
+          <a:xfrm>
+            <a:off x="1143000" y="6896100"/>
+            <a:ext cx="4924425" cy="609600"/>
+          </a:xfrm>
+          <a:prstGeom prst="rect">
+            <a:avLst/>
+          </a:prstGeom>
+          <a:noFill/>
+          <a:ln/>
+        </p:spPr>
+        <p:txBody>
+          <a:bodyPr wrap="square" lIns="0" tIns="8906" rIns="0" bIns="-8906" rtlCol="0" anchor="t"/>
+          <a:lstStyle/>
+          <a:p>
+            <a:pPr algn="l" indent="0" marL="0">
+              <a:lnSpc>
+                <a:spcPts val="2145"/>
+              </a:lnSpc>
+              <a:buNone/>
+            </a:pPr>
+            <a:r>
+              <a:rPr lang="en-US" sz="1650" dirty="0" spc="-1" kern="0">
+                <a:solidFill>
+                  <a:srgbClr val="D8D3C4"/>
+                </a:solidFill>
+                <a:latin typeface="Be Vietnam Pro" pitchFamily="34" charset="0"/>
+                <a:ea typeface="Be Vietnam Pro" pitchFamily="34" charset="-122"/>
+                <a:cs typeface="Be Vietnam Pro" pitchFamily="34" charset="-120"/>
+              </a:rPr>
+              <a:t>chuẩn</a:t>
+            </a:r>
+            <a:r>
+              <a:rPr lang="en-US" sz="1650" dirty="0" spc="-8" kern="0">
+                <a:solidFill>
+                  <a:srgbClr val="D8D3C4"/>
+                </a:solidFill>
+                <a:latin typeface="Be Vietnam Pro" pitchFamily="34" charset="0"/>
+                <a:ea typeface="Be Vietnam Pro" pitchFamily="34" charset="-122"/>
+                <a:cs typeface="Be Vietnam Pro" pitchFamily="34" charset="-120"/>
+              </a:rPr>
+              <a:t> gói</a:t>
+            </a:r>
+            <a:r>
+              <a:rPr lang="en-US" sz="1650" dirty="0" spc="-4" kern="0">
+                <a:solidFill>
+                  <a:srgbClr val="D8D3C4"/>
+                </a:solidFill>
+                <a:latin typeface="Be Vietnam Pro" pitchFamily="34" charset="0"/>
+                <a:ea typeface="Be Vietnam Pro" pitchFamily="34" charset="-122"/>
+                <a:cs typeface="Be Vietnam Pro" pitchFamily="34" charset="-120"/>
+              </a:rPr>
+              <a:t> sẵn</a:t>
+            </a:r>
+            <a:r>
+              <a:rPr lang="en-US" sz="1650" dirty="0" spc="0" kern="0">
+                <a:solidFill>
+                  <a:srgbClr val="D8D3C4"/>
+                </a:solidFill>
+                <a:latin typeface="Be Vietnam Pro" pitchFamily="34" charset="0"/>
+                <a:ea typeface="Be Vietnam Pro" pitchFamily="34" charset="-122"/>
+                <a:cs typeface="Be Vietnam Pro" pitchFamily="34" charset="-120"/>
+              </a:rPr>
+              <a:t> việc</a:t>
+            </a:r>
+            <a:r>
+              <a:rPr lang="en-US" sz="1650" dirty="0" spc="1" kern="0">
+                <a:solidFill>
+                  <a:srgbClr val="D8D3C4"/>
+                </a:solidFill>
+                <a:latin typeface="Be Vietnam Pro" pitchFamily="34" charset="0"/>
+                <a:ea typeface="Be Vietnam Pro" pitchFamily="34" charset="-122"/>
+                <a:cs typeface="Be Vietnam Pro" pitchFamily="34" charset="-120"/>
+              </a:rPr>
+              <a:t> thống</a:t>
+            </a:r>
+            <a:r>
+              <a:rPr lang="en-US" sz="1650" dirty="0" spc="-5" kern="0">
+                <a:solidFill>
+                  <a:srgbClr val="D8D3C4"/>
+                </a:solidFill>
+                <a:latin typeface="Be Vietnam Pro" pitchFamily="34" charset="0"/>
+                <a:ea typeface="Be Vietnam Pro" pitchFamily="34" charset="-122"/>
+                <a:cs typeface="Be Vietnam Pro" pitchFamily="34" charset="-120"/>
+              </a:rPr>
+              <a:t> nhất</a:t>
+            </a:r>
+            <a:r>
+              <a:rPr lang="en-US" sz="1650" dirty="0" spc="-1" kern="0">
+                <a:solidFill>
+                  <a:srgbClr val="D8D3C4"/>
+                </a:solidFill>
+                <a:latin typeface="Be Vietnam Pro" pitchFamily="34" charset="0"/>
+                <a:ea typeface="Be Vietnam Pro" pitchFamily="34" charset="-122"/>
+                <a:cs typeface="Be Vietnam Pro" pitchFamily="34" charset="-120"/>
+              </a:rPr>
+              <a:t> khóa</a:t>
+            </a:r>
+            <a:r>
+              <a:rPr lang="en-US" sz="1650" dirty="0" spc="-8" kern="0">
+                <a:solidFill>
+                  <a:srgbClr val="D8D3C4"/>
+                </a:solidFill>
+                <a:latin typeface="Be Vietnam Pro" pitchFamily="34" charset="0"/>
+                <a:ea typeface="Be Vietnam Pro" pitchFamily="34" charset="-122"/>
+                <a:cs typeface="Be Vietnam Pro" pitchFamily="34" charset="-120"/>
+              </a:rPr>
+              <a:t> và</a:t>
+            </a:r>
+            <a:r>
+              <a:rPr lang="en-US" sz="1650" dirty="0" spc="1" kern="0">
+                <a:solidFill>
+                  <a:srgbClr val="D8D3C4"/>
+                </a:solidFill>
+                <a:latin typeface="Be Vietnam Pro" pitchFamily="34" charset="0"/>
+                <a:ea typeface="Be Vietnam Pro" pitchFamily="34" charset="-122"/>
+                <a:cs typeface="Be Vietnam Pro" pitchFamily="34" charset="-120"/>
+              </a:rPr>
+              <a:t> mã</a:t>
+            </a:r>
+            <a:r>
+              <a:rPr lang="en-US" sz="1650" dirty="0" spc="-1" kern="0">
+                <a:solidFill>
+                  <a:srgbClr val="D8D3C4"/>
+                </a:solidFill>
+                <a:latin typeface="Be Vietnam Pro" pitchFamily="34" charset="0"/>
+                <a:ea typeface="Be Vietnam Pro" pitchFamily="34" charset="-122"/>
+                <a:cs typeface="Be Vietnam Pro" pitchFamily="34" charset="-120"/>
+              </a:rPr>
+              <a:t> hóa</a:t>
+            </a:r>
+            <a:endParaRPr lang="en-US" sz="1650" dirty="0"/>
+          </a:p>
+        </p:txBody>
+      </p:sp>
+      <p:sp>
+        <p:nvSpPr>
+          <p:cNvPr id="39" name="Shape 37"/>
+          <p:cNvSpPr/>
+          <p:nvPr/>
+        </p:nvSpPr>
+        <p:spPr>
+          <a:xfrm>
+            <a:off x="6448425" y="5676900"/>
+            <a:ext cx="5381625" cy="1962150"/>
+          </a:xfrm>
+          <a:prstGeom prst="roundRect">
+            <a:avLst>
+              <a:gd name="adj" fmla="val 10680"/>
+            </a:avLst>
+          </a:prstGeom>
+          <a:solidFill>
+            <a:srgbClr val="1E212B"/>
+          </a:solidFill>
+          <a:ln/>
+        </p:spPr>
+      </p:sp>
+      <p:sp>
+        <p:nvSpPr>
+          <p:cNvPr id="40" name="Text 38"/>
+          <p:cNvSpPr/>
+          <p:nvPr/>
+        </p:nvSpPr>
+        <p:spPr>
+          <a:xfrm>
+            <a:off x="6677025" y="5829300"/>
+            <a:ext cx="4924425" cy="438150"/>
+          </a:xfrm>
+          <a:prstGeom prst="rect">
+            <a:avLst/>
+          </a:prstGeom>
+          <a:noFill/>
+          <a:ln/>
+        </p:spPr>
+        <p:txBody>
+          <a:bodyPr wrap="square" lIns="0" tIns="0" rIns="0" bIns="0" rtlCol="0" anchor="t"/>
+          <a:lstStyle/>
+          <a:p>
+            <a:pPr algn="l" indent="0" marL="0">
+              <a:buNone/>
+            </a:pPr>
+            <a:r>
+              <a:rPr lang="en-US" sz="2550" dirty="0" spc="-62" kern="0">
+                <a:solidFill>
+                  <a:srgbClr val="D8D3C4"/>
+                </a:solidFill>
+                <a:latin typeface="Bricolage Grotesque ExtraBold" pitchFamily="34" charset="0"/>
+                <a:ea typeface="Bricolage Grotesque ExtraBold" pitchFamily="34" charset="-122"/>
+                <a:cs typeface="Bricolage Grotesque ExtraBold" pitchFamily="34" charset="-120"/>
+              </a:rPr>
+              <a:t>OWASP</a:t>
+            </a:r>
+            <a:endParaRPr lang="en-US" sz="2550" dirty="0"/>
+          </a:p>
+        </p:txBody>
+      </p:sp>
+      <p:sp>
+        <p:nvSpPr>
+          <p:cNvPr id="41" name="Text 39"/>
+          <p:cNvSpPr/>
+          <p:nvPr/>
+        </p:nvSpPr>
+        <p:spPr>
+          <a:xfrm>
+            <a:off x="6677025" y="6286500"/>
+            <a:ext cx="4924425" cy="571500"/>
+          </a:xfrm>
+          <a:prstGeom prst="rect">
+            <a:avLst/>
+          </a:prstGeom>
+          <a:noFill/>
+          <a:ln/>
+        </p:spPr>
+        <p:txBody>
+          <a:bodyPr wrap="square" lIns="0" tIns="8906" rIns="0" bIns="-8906" rtlCol="0" anchor="t"/>
+          <a:lstStyle/>
+          <a:p>
+            <a:pPr algn="l" indent="0" marL="0">
+              <a:lnSpc>
+                <a:spcPts val="2145"/>
+              </a:lnSpc>
+              <a:buNone/>
+            </a:pPr>
+            <a:r>
+              <a:rPr lang="en-US" sz="1650" dirty="0" spc="-3" kern="0">
+                <a:solidFill>
+                  <a:srgbClr val="9A98A0"/>
+                </a:solidFill>
+                <a:latin typeface="Be Vietnam Pro" pitchFamily="34" charset="0"/>
+                <a:ea typeface="Be Vietnam Pro" pitchFamily="34" charset="-122"/>
+                <a:cs typeface="Be Vietnam Pro" pitchFamily="34" charset="-120"/>
+              </a:rPr>
+              <a:t>Open</a:t>
+            </a:r>
+            <a:r>
+              <a:rPr lang="en-US" sz="1650" dirty="0" spc="-8" kern="0">
+                <a:solidFill>
+                  <a:srgbClr val="9A98A0"/>
+                </a:solidFill>
+                <a:latin typeface="Be Vietnam Pro" pitchFamily="34" charset="0"/>
+                <a:ea typeface="Be Vietnam Pro" pitchFamily="34" charset="-122"/>
+                <a:cs typeface="Be Vietnam Pro" pitchFamily="34" charset="-120"/>
+              </a:rPr>
+              <a:t> Worldwide</a:t>
+            </a:r>
+            <a:r>
+              <a:rPr lang="en-US" sz="1650" dirty="0" spc="-4" kern="0">
+                <a:solidFill>
+                  <a:srgbClr val="9A98A0"/>
+                </a:solidFill>
+                <a:latin typeface="Be Vietnam Pro" pitchFamily="34" charset="0"/>
+                <a:ea typeface="Be Vietnam Pro" pitchFamily="34" charset="-122"/>
+                <a:cs typeface="Be Vietnam Pro" pitchFamily="34" charset="-120"/>
+              </a:rPr>
+              <a:t> Application</a:t>
+            </a:r>
+            <a:r>
+              <a:rPr lang="en-US" sz="1650" dirty="0" spc="1" kern="0">
+                <a:solidFill>
+                  <a:srgbClr val="9A98A0"/>
+                </a:solidFill>
+                <a:latin typeface="Be Vietnam Pro" pitchFamily="34" charset="0"/>
+                <a:ea typeface="Be Vietnam Pro" pitchFamily="34" charset="-122"/>
+                <a:cs typeface="Be Vietnam Pro" pitchFamily="34" charset="-120"/>
+              </a:rPr>
+              <a:t> Security</a:t>
+            </a:r>
+            <a:r>
+              <a:rPr lang="en-US" sz="1650" dirty="0" spc="-16" kern="0">
+                <a:solidFill>
+                  <a:srgbClr val="9A98A0"/>
+                </a:solidFill>
+                <a:latin typeface="Be Vietnam Pro" pitchFamily="34" charset="0"/>
+                <a:ea typeface="Be Vietnam Pro" pitchFamily="34" charset="-122"/>
+                <a:cs typeface="Be Vietnam Pro" pitchFamily="34" charset="-120"/>
+              </a:rPr>
+              <a:t> Project</a:t>
+            </a:r>
+            <a:endParaRPr lang="en-US" sz="1650" dirty="0"/>
+          </a:p>
+        </p:txBody>
+      </p:sp>
+      <p:sp>
+        <p:nvSpPr>
+          <p:cNvPr id="42" name="Text 40"/>
+          <p:cNvSpPr/>
+          <p:nvPr/>
+        </p:nvSpPr>
+        <p:spPr>
+          <a:xfrm>
+            <a:off x="6677025" y="6896100"/>
+            <a:ext cx="4924425" cy="609600"/>
+          </a:xfrm>
+          <a:prstGeom prst="rect">
+            <a:avLst/>
+          </a:prstGeom>
+          <a:noFill/>
+          <a:ln/>
+        </p:spPr>
+        <p:txBody>
+          <a:bodyPr wrap="square" lIns="0" tIns="8906" rIns="0" bIns="-8906" rtlCol="0" anchor="t"/>
+          <a:lstStyle/>
+          <a:p>
+            <a:pPr algn="l" indent="0" marL="0">
+              <a:lnSpc>
+                <a:spcPts val="2145"/>
+              </a:lnSpc>
+              <a:buNone/>
+            </a:pPr>
+            <a:r>
+              <a:rPr lang="en-US" sz="1650" dirty="0" spc="-13" kern="0">
+                <a:solidFill>
+                  <a:srgbClr val="D8D3C4"/>
+                </a:solidFill>
+                <a:latin typeface="Be Vietnam Pro" pitchFamily="34" charset="0"/>
+                <a:ea typeface="Be Vietnam Pro" pitchFamily="34" charset="-122"/>
+                <a:cs typeface="Be Vietnam Pro" pitchFamily="34" charset="-120"/>
+              </a:rPr>
+              <a:t>tổ</a:t>
+            </a:r>
+            <a:r>
+              <a:rPr lang="en-US" sz="1650" dirty="0" spc="5" kern="0">
+                <a:solidFill>
+                  <a:srgbClr val="D8D3C4"/>
+                </a:solidFill>
+                <a:latin typeface="Be Vietnam Pro" pitchFamily="34" charset="0"/>
+                <a:ea typeface="Be Vietnam Pro" pitchFamily="34" charset="-122"/>
+                <a:cs typeface="Be Vietnam Pro" pitchFamily="34" charset="-120"/>
+              </a:rPr>
+              <a:t> chức</a:t>
+            </a:r>
+            <a:r>
+              <a:rPr lang="en-US" sz="1650" dirty="0" spc="0" kern="0">
+                <a:solidFill>
+                  <a:srgbClr val="D8D3C4"/>
+                </a:solidFill>
+                <a:latin typeface="Be Vietnam Pro" pitchFamily="34" charset="0"/>
+                <a:ea typeface="Be Vietnam Pro" pitchFamily="34" charset="-122"/>
+                <a:cs typeface="Be Vietnam Pro" pitchFamily="34" charset="-120"/>
+              </a:rPr>
+              <a:t> cộng</a:t>
+            </a:r>
+            <a:r>
+              <a:rPr lang="en-US" sz="1650" dirty="0" spc="7" kern="0">
+                <a:solidFill>
+                  <a:srgbClr val="D8D3C4"/>
+                </a:solidFill>
+                <a:latin typeface="Be Vietnam Pro" pitchFamily="34" charset="0"/>
+                <a:ea typeface="Be Vietnam Pro" pitchFamily="34" charset="-122"/>
+                <a:cs typeface="Be Vietnam Pro" pitchFamily="34" charset="-120"/>
+              </a:rPr>
+              <a:t> đồng</a:t>
+            </a:r>
+            <a:r>
+              <a:rPr lang="en-US" sz="1650" dirty="0" spc="-7" kern="0">
+                <a:solidFill>
+                  <a:srgbClr val="D8D3C4"/>
+                </a:solidFill>
+                <a:latin typeface="Be Vietnam Pro" pitchFamily="34" charset="0"/>
+                <a:ea typeface="Be Vietnam Pro" pitchFamily="34" charset="-122"/>
+                <a:cs typeface="Be Vietnam Pro" pitchFamily="34" charset="-120"/>
+              </a:rPr>
+              <a:t> về</a:t>
+            </a:r>
+            <a:r>
+              <a:rPr lang="en-US" sz="1650" dirty="0" spc="-1" kern="0">
+                <a:solidFill>
+                  <a:srgbClr val="D8D3C4"/>
+                </a:solidFill>
+                <a:latin typeface="Be Vietnam Pro" pitchFamily="34" charset="0"/>
+                <a:ea typeface="Be Vietnam Pro" pitchFamily="34" charset="-122"/>
+                <a:cs typeface="Be Vietnam Pro" pitchFamily="34" charset="-120"/>
+              </a:rPr>
+              <a:t> bảo</a:t>
+            </a:r>
+            <a:r>
+              <a:rPr lang="en-US" sz="1650" dirty="0" spc="-5" kern="0">
+                <a:solidFill>
+                  <a:srgbClr val="D8D3C4"/>
+                </a:solidFill>
+                <a:latin typeface="Be Vietnam Pro" pitchFamily="34" charset="0"/>
+                <a:ea typeface="Be Vietnam Pro" pitchFamily="34" charset="-122"/>
+                <a:cs typeface="Be Vietnam Pro" pitchFamily="34" charset="-120"/>
+              </a:rPr>
+              <a:t> mật</a:t>
+            </a:r>
+            <a:r>
+              <a:rPr lang="en-US" sz="1650" dirty="0" spc="16" kern="0">
+                <a:solidFill>
+                  <a:srgbClr val="D8D3C4"/>
+                </a:solidFill>
+                <a:latin typeface="Be Vietnam Pro" pitchFamily="34" charset="0"/>
+                <a:ea typeface="Be Vietnam Pro" pitchFamily="34" charset="-122"/>
+                <a:cs typeface="Be Vietnam Pro" pitchFamily="34" charset="-120"/>
+              </a:rPr>
+              <a:t> ứng</a:t>
+            </a:r>
+            <a:r>
+              <a:rPr lang="en-US" sz="1650" dirty="0" spc="0" kern="0">
+                <a:solidFill>
+                  <a:srgbClr val="D8D3C4"/>
+                </a:solidFill>
+                <a:latin typeface="Be Vietnam Pro" pitchFamily="34" charset="0"/>
+                <a:ea typeface="Be Vietnam Pro" pitchFamily="34" charset="-122"/>
+                <a:cs typeface="Be Vietnam Pro" pitchFamily="34" charset="-120"/>
+              </a:rPr>
+              <a:t> dụng</a:t>
+            </a:r>
+            <a:endParaRPr lang="en-US" sz="1650" dirty="0"/>
+          </a:p>
+        </p:txBody>
+      </p:sp>
+      <p:sp>
+        <p:nvSpPr>
+          <p:cNvPr id="43" name="Shape 41"/>
+          <p:cNvSpPr/>
+          <p:nvPr/>
+        </p:nvSpPr>
+        <p:spPr>
+          <a:xfrm>
+            <a:off x="11982450" y="5676900"/>
+            <a:ext cx="5391150" cy="1962150"/>
+          </a:xfrm>
+          <a:prstGeom prst="roundRect">
+            <a:avLst>
+              <a:gd name="adj" fmla="val 10680"/>
+            </a:avLst>
+          </a:prstGeom>
+          <a:solidFill>
+            <a:srgbClr val="1E212B"/>
+          </a:solidFill>
+          <a:ln/>
+        </p:spPr>
+      </p:sp>
+      <p:sp>
+        <p:nvSpPr>
+          <p:cNvPr id="44" name="Text 42"/>
+          <p:cNvSpPr/>
+          <p:nvPr/>
+        </p:nvSpPr>
+        <p:spPr>
+          <a:xfrm>
+            <a:off x="12211050" y="5829300"/>
+            <a:ext cx="4933950" cy="438150"/>
+          </a:xfrm>
+          <a:prstGeom prst="rect">
+            <a:avLst/>
+          </a:prstGeom>
+          <a:noFill/>
+          <a:ln/>
+        </p:spPr>
+        <p:txBody>
+          <a:bodyPr wrap="square" lIns="0" tIns="0" rIns="0" bIns="0" rtlCol="0" anchor="t"/>
+          <a:lstStyle/>
+          <a:p>
+            <a:pPr algn="l" indent="0" marL="0">
+              <a:buNone/>
+            </a:pPr>
+            <a:r>
+              <a:rPr lang="en-US" sz="2550" dirty="0" spc="-4" kern="0">
+                <a:solidFill>
+                  <a:srgbClr val="D8D3C4"/>
+                </a:solidFill>
+                <a:latin typeface="Bricolage Grotesque ExtraBold" pitchFamily="34" charset="0"/>
+                <a:ea typeface="Bricolage Grotesque ExtraBold" pitchFamily="34" charset="-122"/>
+                <a:cs typeface="Bricolage Grotesque ExtraBold" pitchFamily="34" charset="-120"/>
+              </a:rPr>
+              <a:t>MDN</a:t>
+            </a:r>
+            <a:endParaRPr lang="en-US" sz="2550" dirty="0"/>
+          </a:p>
+        </p:txBody>
+      </p:sp>
+      <p:sp>
+        <p:nvSpPr>
+          <p:cNvPr id="45" name="Text 43"/>
+          <p:cNvSpPr/>
+          <p:nvPr/>
+        </p:nvSpPr>
+        <p:spPr>
+          <a:xfrm>
+            <a:off x="12211050" y="6286500"/>
+            <a:ext cx="4933950" cy="571500"/>
+          </a:xfrm>
+          <a:prstGeom prst="rect">
+            <a:avLst/>
+          </a:prstGeom>
+          <a:noFill/>
+          <a:ln/>
+        </p:spPr>
+        <p:txBody>
+          <a:bodyPr wrap="square" lIns="0" tIns="8906" rIns="0" bIns="-8906" rtlCol="0" anchor="t"/>
+          <a:lstStyle/>
+          <a:p>
+            <a:pPr algn="l" indent="0" marL="0">
+              <a:lnSpc>
+                <a:spcPts val="2145"/>
+              </a:lnSpc>
+              <a:buNone/>
+            </a:pPr>
+            <a:r>
+              <a:rPr lang="en-US" sz="1650" dirty="0" spc="-3" kern="0">
+                <a:solidFill>
+                  <a:srgbClr val="9A98A0"/>
+                </a:solidFill>
+                <a:latin typeface="Be Vietnam Pro" pitchFamily="34" charset="0"/>
+                <a:ea typeface="Be Vietnam Pro" pitchFamily="34" charset="-122"/>
+                <a:cs typeface="Be Vietnam Pro" pitchFamily="34" charset="-120"/>
+              </a:rPr>
+              <a:t>Mozilla</a:t>
+            </a:r>
+            <a:r>
+              <a:rPr lang="en-US" sz="1650" dirty="0" spc="-7" kern="0">
+                <a:solidFill>
+                  <a:srgbClr val="9A98A0"/>
+                </a:solidFill>
+                <a:latin typeface="Be Vietnam Pro" pitchFamily="34" charset="0"/>
+                <a:ea typeface="Be Vietnam Pro" pitchFamily="34" charset="-122"/>
+                <a:cs typeface="Be Vietnam Pro" pitchFamily="34" charset="-120"/>
+              </a:rPr>
+              <a:t> Developer</a:t>
+            </a:r>
+            <a:r>
+              <a:rPr lang="en-US" sz="1650" dirty="0" spc="-6" kern="0">
+                <a:solidFill>
+                  <a:srgbClr val="9A98A0"/>
+                </a:solidFill>
+                <a:latin typeface="Be Vietnam Pro" pitchFamily="34" charset="0"/>
+                <a:ea typeface="Be Vietnam Pro" pitchFamily="34" charset="-122"/>
+                <a:cs typeface="Be Vietnam Pro" pitchFamily="34" charset="-120"/>
+              </a:rPr>
+              <a:t> Network</a:t>
+            </a:r>
+            <a:endParaRPr lang="en-US" sz="1650" dirty="0"/>
+          </a:p>
+        </p:txBody>
+      </p:sp>
+      <p:sp>
+        <p:nvSpPr>
+          <p:cNvPr id="46" name="Text 44"/>
+          <p:cNvSpPr/>
+          <p:nvPr/>
+        </p:nvSpPr>
+        <p:spPr>
+          <a:xfrm>
+            <a:off x="12211050" y="6896100"/>
+            <a:ext cx="4933950" cy="609600"/>
+          </a:xfrm>
+          <a:prstGeom prst="rect">
+            <a:avLst/>
+          </a:prstGeom>
+          <a:noFill/>
+          <a:ln/>
+        </p:spPr>
+        <p:txBody>
+          <a:bodyPr wrap="square" lIns="0" tIns="8906" rIns="0" bIns="-8906" rtlCol="0" anchor="t"/>
+          <a:lstStyle/>
+          <a:p>
+            <a:pPr algn="l" indent="0" marL="0">
+              <a:lnSpc>
+                <a:spcPts val="2145"/>
+              </a:lnSpc>
+              <a:buNone/>
+            </a:pPr>
+            <a:r>
+              <a:rPr lang="en-US" sz="1650" dirty="0" spc="-9" kern="0">
+                <a:solidFill>
+                  <a:srgbClr val="D8D3C4"/>
+                </a:solidFill>
+                <a:latin typeface="Be Vietnam Pro" pitchFamily="34" charset="0"/>
+                <a:ea typeface="Be Vietnam Pro" pitchFamily="34" charset="-122"/>
+                <a:cs typeface="Be Vietnam Pro" pitchFamily="34" charset="-120"/>
+              </a:rPr>
+              <a:t>tên</a:t>
+            </a:r>
+            <a:r>
+              <a:rPr lang="en-US" sz="1650" dirty="0" spc="1" kern="0">
+                <a:solidFill>
+                  <a:srgbClr val="D8D3C4"/>
+                </a:solidFill>
+                <a:latin typeface="Be Vietnam Pro" pitchFamily="34" charset="0"/>
+                <a:ea typeface="Be Vietnam Pro" pitchFamily="34" charset="-122"/>
+                <a:cs typeface="Be Vietnam Pro" pitchFamily="34" charset="-120"/>
+              </a:rPr>
+              <a:t> cũ</a:t>
+            </a:r>
+            <a:r>
+              <a:rPr lang="en-US" sz="1650" dirty="0" spc="0" kern="0">
+                <a:solidFill>
+                  <a:srgbClr val="D8D3C4"/>
+                </a:solidFill>
+                <a:latin typeface="Be Vietnam Pro" pitchFamily="34" charset="0"/>
+                <a:ea typeface="Be Vietnam Pro" pitchFamily="34" charset="-122"/>
+                <a:cs typeface="Be Vietnam Pro" pitchFamily="34" charset="-120"/>
+              </a:rPr>
+              <a:t> của</a:t>
+            </a:r>
+            <a:r>
+              <a:rPr lang="en-US" sz="1650" dirty="0" spc="-1" kern="0">
+                <a:solidFill>
+                  <a:srgbClr val="D8D3C4"/>
+                </a:solidFill>
+                <a:latin typeface="Be Vietnam Pro" pitchFamily="34" charset="0"/>
+                <a:ea typeface="Be Vietnam Pro" pitchFamily="34" charset="-122"/>
+                <a:cs typeface="Be Vietnam Pro" pitchFamily="34" charset="-120"/>
+              </a:rPr>
+              <a:t> MDN</a:t>
+            </a:r>
+            <a:r>
+              <a:rPr lang="en-US" sz="1650" dirty="0" spc="-18" kern="0">
+                <a:solidFill>
+                  <a:srgbClr val="D8D3C4"/>
+                </a:solidFill>
+                <a:latin typeface="Be Vietnam Pro" pitchFamily="34" charset="0"/>
+                <a:ea typeface="Be Vietnam Pro" pitchFamily="34" charset="-122"/>
+                <a:cs typeface="Be Vietnam Pro" pitchFamily="34" charset="-120"/>
+              </a:rPr>
+              <a:t> Web</a:t>
+            </a:r>
+            <a:r>
+              <a:rPr lang="en-US" sz="1650" dirty="0" spc="-1" kern="0">
+                <a:solidFill>
+                  <a:srgbClr val="D8D3C4"/>
+                </a:solidFill>
+                <a:latin typeface="Be Vietnam Pro" pitchFamily="34" charset="0"/>
+                <a:ea typeface="Be Vietnam Pro" pitchFamily="34" charset="-122"/>
+                <a:cs typeface="Be Vietnam Pro" pitchFamily="34" charset="-120"/>
+              </a:rPr>
+              <a:t> Docs,</a:t>
+            </a:r>
+            <a:r>
+              <a:rPr lang="en-US" sz="1650" dirty="0" spc="-5" kern="0">
+                <a:solidFill>
+                  <a:srgbClr val="D8D3C4"/>
+                </a:solidFill>
+                <a:latin typeface="Be Vietnam Pro" pitchFamily="34" charset="0"/>
+                <a:ea typeface="Be Vietnam Pro" pitchFamily="34" charset="-122"/>
+                <a:cs typeface="Be Vietnam Pro" pitchFamily="34" charset="-120"/>
+              </a:rPr>
+              <a:t> tài</a:t>
+            </a:r>
+            <a:r>
+              <a:rPr lang="en-US" sz="1650" dirty="0" spc="0" kern="0">
+                <a:solidFill>
+                  <a:srgbClr val="D8D3C4"/>
+                </a:solidFill>
+                <a:latin typeface="Be Vietnam Pro" pitchFamily="34" charset="0"/>
+                <a:ea typeface="Be Vietnam Pro" pitchFamily="34" charset="-122"/>
+                <a:cs typeface="Be Vietnam Pro" pitchFamily="34" charset="-120"/>
+              </a:rPr>
+              <a:t> liệu</a:t>
+            </a:r>
+            <a:r>
+              <a:rPr lang="en-US" sz="1650" dirty="0" spc="-16" kern="0">
+                <a:solidFill>
+                  <a:srgbClr val="D8D3C4"/>
+                </a:solidFill>
+                <a:latin typeface="Be Vietnam Pro" pitchFamily="34" charset="0"/>
+                <a:ea typeface="Be Vietnam Pro" pitchFamily="34" charset="-122"/>
+                <a:cs typeface="Be Vietnam Pro" pitchFamily="34" charset="-120"/>
+              </a:rPr>
+              <a:t> tra</a:t>
+            </a:r>
+            <a:r>
+              <a:rPr lang="en-US" sz="1650" dirty="0" spc="13" kern="0">
+                <a:solidFill>
+                  <a:srgbClr val="D8D3C4"/>
+                </a:solidFill>
+                <a:latin typeface="Be Vietnam Pro" pitchFamily="34" charset="0"/>
+                <a:ea typeface="Be Vietnam Pro" pitchFamily="34" charset="-122"/>
+                <a:cs typeface="Be Vietnam Pro" pitchFamily="34" charset="-120"/>
+              </a:rPr>
+              <a:t> cứu</a:t>
+            </a:r>
+            <a:r>
+              <a:rPr lang="en-US" sz="1650" dirty="0" spc="-8" kern="0">
+                <a:solidFill>
+                  <a:srgbClr val="D8D3C4"/>
+                </a:solidFill>
+                <a:latin typeface="Be Vietnam Pro" pitchFamily="34" charset="0"/>
+                <a:ea typeface="Be Vietnam Pro" pitchFamily="34" charset="-122"/>
+                <a:cs typeface="Be Vietnam Pro" pitchFamily="34" charset="-120"/>
+              </a:rPr>
+              <a:t> web</a:t>
+            </a:r>
+            <a:endParaRPr lang="en-US" sz="1650" dirty="0"/>
+          </a:p>
+        </p:txBody>
+      </p:sp>
+      <p:sp>
+        <p:nvSpPr>
+          <p:cNvPr id="47" name="Connector line-1792390660876-51721744"/>
+          <p:cNvSpPr/>
+          <p:nvPr/>
+        </p:nvSpPr>
+        <p:spPr>
+          <a:xfrm>
+            <a:off x="914400" y="7829550"/>
             <a:ext cx="16459200" cy="0"/>
           </a:xfrm>
           <a:prstGeom prst="line">
@@ -5249,13 +5972,13 @@
       </p:sp>
       <p:sp>
         <p:nvSpPr>
-          <p:cNvPr id="37" name="Text 35"/>
-          <p:cNvSpPr/>
-          <p:nvPr/>
-        </p:nvSpPr>
-        <p:spPr>
-          <a:xfrm>
-            <a:off x="914400" y="7810500"/>
+          <p:cNvPr id="48" name="Text 46"/>
+          <p:cNvSpPr/>
+          <p:nvPr/>
+        </p:nvSpPr>
+        <p:spPr>
+          <a:xfrm>
+            <a:off x="914400" y="7962900"/>
             <a:ext cx="7620000" cy="285750"/>
           </a:xfrm>
           <a:prstGeom prst="rect">
@@ -5310,14 +6033,14 @@
       </p:sp>
       <p:sp>
         <p:nvSpPr>
-          <p:cNvPr id="38" name="Text 36"/>
-          <p:cNvSpPr/>
-          <p:nvPr/>
-        </p:nvSpPr>
-        <p:spPr>
-          <a:xfrm>
-            <a:off x="914400" y="8172450"/>
-            <a:ext cx="16459200" cy="419100"/>
+          <p:cNvPr id="49" name="Text 47"/>
+          <p:cNvSpPr/>
+          <p:nvPr/>
+        </p:nvSpPr>
+        <p:spPr>
+          <a:xfrm>
+            <a:off x="914400" y="8305800"/>
+            <a:ext cx="16459200" cy="381000"/>
           </a:xfrm>
           <a:prstGeom prst="rect">
             <a:avLst/>
@@ -5333,7 +6056,7 @@
               <a:buNone/>
             </a:pPr>
             <a:r>
-              <a:rPr lang="en-US" sz="2250" dirty="0" spc="-3" kern="0">
+              <a:rPr lang="en-US" sz="1950" dirty="0" spc="-2" kern="0">
                 <a:solidFill>
                   <a:srgbClr val="F3EEE3"/>
                 </a:solidFill>
@@ -5344,7 +6067,7 @@
               <a:t>MDN</a:t>
             </a:r>
             <a:r>
-              <a:rPr lang="en-US" sz="2250" dirty="0" spc="2" kern="0">
+              <a:rPr lang="en-US" sz="1950" dirty="0" spc="-1" kern="0">
                 <a:solidFill>
                   <a:srgbClr val="F3EEE3"/>
                 </a:solidFill>
@@ -5355,7 +6078,7 @@
               <a:t> ·</a:t>
             </a:r>
             <a:r>
-              <a:rPr lang="en-US" sz="2250" dirty="0" spc="-22" kern="0">
+              <a:rPr lang="en-US" sz="1950" dirty="0" spc="-19" kern="0">
                 <a:solidFill>
                   <a:srgbClr val="F3EEE3"/>
                 </a:solidFill>
@@ -5366,7 +6089,7 @@
               <a:t> pyca/cryptography</a:t>
             </a:r>
             <a:r>
-              <a:rPr lang="en-US" sz="2250" dirty="0" spc="2" kern="0">
+              <a:rPr lang="en-US" sz="1950" dirty="0" spc="0" kern="0">
                 <a:solidFill>
                   <a:srgbClr val="F3EEE3"/>
                 </a:solidFill>
@@ -5377,7 +6100,7 @@
               <a:t> ·</a:t>
             </a:r>
             <a:r>
-              <a:rPr lang="en-US" sz="2250" dirty="0" spc="-44" kern="0">
+              <a:rPr lang="en-US" sz="1950" dirty="0" spc="-39" kern="0">
                 <a:solidFill>
                   <a:srgbClr val="F3EEE3"/>
                 </a:solidFill>
@@ -5388,7 +6111,7 @@
               <a:t> OWASP</a:t>
             </a:r>
             <a:r>
-              <a:rPr lang="en-US" sz="2250" dirty="0" spc="0" kern="0">
+              <a:rPr lang="en-US" sz="1950" dirty="0" spc="0" kern="0">
                 <a:solidFill>
                   <a:srgbClr val="F3EEE3"/>
                 </a:solidFill>
@@ -5399,7 +6122,7 @@
               <a:t> ·</a:t>
             </a:r>
             <a:r>
-              <a:rPr lang="en-US" sz="2250" dirty="0" spc="-6" kern="0">
+              <a:rPr lang="en-US" sz="1950" dirty="0" spc="-5" kern="0">
                 <a:solidFill>
                   <a:srgbClr val="F3EEE3"/>
                 </a:solidFill>
@@ -5410,7 +6133,7 @@
               <a:t> ByteByteGo</a:t>
             </a:r>
             <a:r>
-              <a:rPr lang="en-US" sz="2250" dirty="0" spc="-10" kern="0">
+              <a:rPr lang="en-US" sz="1950" dirty="0" spc="-8" kern="0">
                 <a:solidFill>
                   <a:srgbClr val="F3EEE3"/>
                 </a:solidFill>
@@ -5420,20 +6143,20 @@
               </a:rPr>
               <a:t> system-design-101</a:t>
             </a:r>
-            <a:endParaRPr lang="en-US" sz="2250" dirty="0"/>
+            <a:endParaRPr lang="en-US" sz="1950" dirty="0"/>
           </a:p>
         </p:txBody>
       </p:sp>
       <p:sp>
         <p:nvSpPr>
-          <p:cNvPr id="39" name="Text 37"/>
-          <p:cNvSpPr/>
-          <p:nvPr/>
-        </p:nvSpPr>
-        <p:spPr>
-          <a:xfrm>
-            <a:off x="914400" y="8648700"/>
-            <a:ext cx="16459200" cy="323850"/>
+          <p:cNvPr id="50" name="Text 48"/>
+          <p:cNvSpPr/>
+          <p:nvPr/>
+        </p:nvSpPr>
+        <p:spPr>
+          <a:xfrm>
+            <a:off x="914400" y="8763000"/>
+            <a:ext cx="16459200" cy="304800"/>
           </a:xfrm>
           <a:prstGeom prst="rect">
             <a:avLst/>
@@ -5449,7 +6172,7 @@
               <a:buNone/>
             </a:pPr>
             <a:r>
-              <a:rPr lang="en-US" sz="1800" dirty="0" spc="3" kern="0">
+              <a:rPr lang="en-US" sz="1650" dirty="0" spc="1" kern="0">
                 <a:solidFill>
                   <a:srgbClr val="9A98A0"/>
                 </a:solidFill>
@@ -5460,7 +6183,7 @@
               <a:t>Đã</a:t>
             </a:r>
             <a:r>
-              <a:rPr lang="en-US" sz="1800" dirty="0" spc="10" kern="0">
+              <a:rPr lang="en-US" sz="1650" dirty="0" spc="10" kern="0">
                 <a:solidFill>
                   <a:srgbClr val="9A98A0"/>
                 </a:solidFill>
@@ -5471,7 +6194,7 @@
               <a:t> đối</a:t>
             </a:r>
             <a:r>
-              <a:rPr lang="en-US" sz="1800" dirty="0" spc="-1" kern="0">
+              <a:rPr lang="en-US" sz="1650" dirty="0" spc="1" kern="0">
                 <a:solidFill>
                   <a:srgbClr val="9A98A0"/>
                 </a:solidFill>
@@ -5482,7 +6205,7 @@
               <a:t> chiếu</a:t>
             </a:r>
             <a:r>
-              <a:rPr lang="en-US" sz="1800" dirty="0" spc="-14" kern="0">
+              <a:rPr lang="en-US" sz="1650" dirty="0" spc="-12" kern="0">
                 <a:solidFill>
                   <a:srgbClr val="9A98A0"/>
                 </a:solidFill>
@@ -5493,7 +6216,7 @@
               <a:t> ngày</a:t>
             </a:r>
             <a:r>
-              <a:rPr lang="en-US" sz="1800" dirty="0" spc="1" kern="0">
+              <a:rPr lang="en-US" sz="1650" dirty="0" spc="0" kern="0">
                 <a:solidFill>
                   <a:srgbClr val="9A98A0"/>
                 </a:solidFill>
@@ -5501,10 +6224,10 @@
                 <a:ea typeface="Be Vietnam Pro" pitchFamily="34" charset="-122"/>
                 <a:cs typeface="Be Vietnam Pro" pitchFamily="34" charset="-120"/>
               </a:rPr>
-              <a:t> 2026-10-18.</a:t>
-            </a:r>
-            <a:r>
-              <a:rPr lang="en-US" sz="1800" dirty="0" spc="-2" kern="0">
+              <a:t> 2026-10-18. Hình</a:t>
+            </a:r>
+            <a:r>
+              <a:rPr lang="en-US" sz="1650" dirty="0" spc="-1" kern="0">
                 <a:solidFill>
                   <a:srgbClr val="9A98A0"/>
                 </a:solidFill>
@@ -5512,10 +6235,10 @@
                 <a:ea typeface="Be Vietnam Pro" pitchFamily="34" charset="-122"/>
                 <a:cs typeface="Be Vietnam Pro" pitchFamily="34" charset="-120"/>
               </a:rPr>
-              <a:t> Hình</a:t>
-            </a:r>
-            <a:r>
-              <a:rPr lang="en-US" sz="1800" dirty="0" spc="-3" kern="0">
+              <a:t> minh họa</a:t>
+            </a:r>
+            <a:r>
+              <a:rPr lang="en-US" sz="1650" dirty="0" spc="1" kern="0">
                 <a:solidFill>
                   <a:srgbClr val="9A98A0"/>
                 </a:solidFill>
@@ -5523,10 +6246,10 @@
                 <a:ea typeface="Be Vietnam Pro" pitchFamily="34" charset="-122"/>
                 <a:cs typeface="Be Vietnam Pro" pitchFamily="34" charset="-120"/>
               </a:rPr>
-              <a:t> minh</a:t>
-            </a:r>
-            <a:r>
-              <a:rPr lang="en-US" sz="1800" dirty="0" spc="0" kern="0">
+              <a:t> là</a:t>
+            </a:r>
+            <a:r>
+              <a:rPr lang="en-US" sz="1650" dirty="0" spc="0" kern="0">
                 <a:solidFill>
                   <a:srgbClr val="9A98A0"/>
                 </a:solidFill>
@@ -5534,10 +6257,10 @@
                 <a:ea typeface="Be Vietnam Pro" pitchFamily="34" charset="-122"/>
                 <a:cs typeface="Be Vietnam Pro" pitchFamily="34" charset="-120"/>
               </a:rPr>
-              <a:t> họa</a:t>
-            </a:r>
-            <a:r>
-              <a:rPr lang="en-US" sz="1800" dirty="0" spc="-1" kern="0">
+              <a:t> thiết</a:t>
+            </a:r>
+            <a:r>
+              <a:rPr lang="en-US" sz="1650" dirty="0" spc="-20" kern="0">
                 <a:solidFill>
                   <a:srgbClr val="9A98A0"/>
                 </a:solidFill>
@@ -5545,10 +6268,10 @@
                 <a:ea typeface="Be Vietnam Pro" pitchFamily="34" charset="-122"/>
                 <a:cs typeface="Be Vietnam Pro" pitchFamily="34" charset="-120"/>
               </a:rPr>
-              <a:t> là</a:t>
-            </a:r>
-            <a:r>
-              <a:rPr lang="en-US" sz="1800" dirty="0" spc="-5" kern="0">
+              <a:t> kế</a:t>
+            </a:r>
+            <a:r>
+              <a:rPr lang="en-US" sz="1650" dirty="0" spc="0" kern="0">
                 <a:solidFill>
                   <a:srgbClr val="9A98A0"/>
                 </a:solidFill>
@@ -5556,145 +6279,7 @@
                 <a:ea typeface="Be Vietnam Pro" pitchFamily="34" charset="-122"/>
                 <a:cs typeface="Be Vietnam Pro" pitchFamily="34" charset="-120"/>
               </a:rPr>
-              <a:t> thiết</a:t>
-            </a:r>
-            <a:r>
-              <a:rPr lang="en-US" sz="1800" dirty="0" spc="-28" kern="0">
-                <a:solidFill>
-                  <a:srgbClr val="9A98A0"/>
-                </a:solidFill>
-                <a:latin typeface="Be Vietnam Pro" pitchFamily="34" charset="0"/>
-                <a:ea typeface="Be Vietnam Pro" pitchFamily="34" charset="-122"/>
-                <a:cs typeface="Be Vietnam Pro" pitchFamily="34" charset="-120"/>
-              </a:rPr>
-              <a:t> kế</a:t>
-            </a:r>
-            <a:r>
-              <a:rPr lang="en-US" sz="1800" dirty="0" spc="-1" kern="0">
-                <a:solidFill>
-                  <a:srgbClr val="9A98A0"/>
-                </a:solidFill>
-                <a:latin typeface="Be Vietnam Pro" pitchFamily="34" charset="0"/>
-                <a:ea typeface="Be Vietnam Pro" pitchFamily="34" charset="-122"/>
-                <a:cs typeface="Be Vietnam Pro" pitchFamily="34" charset="-120"/>
-              </a:rPr>
               <a:t> mới.</a:t>
-            </a:r>
-            <a:endParaRPr lang="en-US" sz="1800" dirty="0"/>
-          </a:p>
-        </p:txBody>
-      </p:sp>
-      <p:sp>
-        <p:nvSpPr>
-          <p:cNvPr id="40" name="Text 38"/>
-          <p:cNvSpPr/>
-          <p:nvPr/>
-        </p:nvSpPr>
-        <p:spPr>
-          <a:xfrm>
-            <a:off x="914400" y="9715500"/>
-            <a:ext cx="7620000" cy="285750"/>
-          </a:xfrm>
-          <a:prstGeom prst="rect">
-            <a:avLst/>
-          </a:prstGeom>
-          <a:noFill/>
-          <a:ln/>
-        </p:spPr>
-        <p:txBody>
-          <a:bodyPr wrap="square" lIns="0" tIns="0" rIns="0" bIns="0" rtlCol="0" anchor="t"/>
-          <a:lstStyle/>
-          <a:p>
-            <a:pPr algn="l" indent="0" marL="0">
-              <a:buNone/>
-            </a:pPr>
-            <a:r>
-              <a:rPr lang="en-US" sz="1650" dirty="0" spc="-12" kern="0">
-                <a:solidFill>
-                  <a:srgbClr val="9A98A0"/>
-                </a:solidFill>
-                <a:latin typeface="Be Vietnam Pro" pitchFamily="34" charset="0"/>
-                <a:ea typeface="Be Vietnam Pro" pitchFamily="34" charset="-122"/>
-                <a:cs typeface="Be Vietnam Pro" pitchFamily="34" charset="-120"/>
-              </a:rPr>
-              <a:t>System</a:t>
-            </a:r>
-            <a:r>
-              <a:rPr lang="en-US" sz="1650" dirty="0" spc="0" kern="0">
-                <a:solidFill>
-                  <a:srgbClr val="9A98A0"/>
-                </a:solidFill>
-                <a:latin typeface="Be Vietnam Pro" pitchFamily="34" charset="0"/>
-                <a:ea typeface="Be Vietnam Pro" pitchFamily="34" charset="-122"/>
-                <a:cs typeface="Be Vietnam Pro" pitchFamily="34" charset="-120"/>
-              </a:rPr>
-              <a:t> Design</a:t>
-            </a:r>
-            <a:r>
-              <a:rPr lang="en-US" sz="1650" dirty="0" spc="1" kern="0">
-                <a:solidFill>
-                  <a:srgbClr val="9A98A0"/>
-                </a:solidFill>
-                <a:latin typeface="Be Vietnam Pro" pitchFamily="34" charset="0"/>
-                <a:ea typeface="Be Vietnam Pro" pitchFamily="34" charset="-122"/>
-                <a:cs typeface="Be Vietnam Pro" pitchFamily="34" charset="-120"/>
-              </a:rPr>
-              <a:t> 101</a:t>
-            </a:r>
-            <a:r>
-              <a:rPr lang="en-US" sz="1650" dirty="0" spc="0" kern="0">
-                <a:solidFill>
-                  <a:srgbClr val="9A98A0"/>
-                </a:solidFill>
-                <a:latin typeface="Be Vietnam Pro" pitchFamily="34" charset="0"/>
-                <a:ea typeface="Be Vietnam Pro" pitchFamily="34" charset="-122"/>
-                <a:cs typeface="Be Vietnam Pro" pitchFamily="34" charset="-120"/>
-              </a:rPr>
-              <a:t> ·</a:t>
-            </a:r>
-            <a:r>
-              <a:rPr lang="en-US" sz="1650" dirty="0" spc="1" kern="0">
-                <a:solidFill>
-                  <a:srgbClr val="9A98A0"/>
-                </a:solidFill>
-                <a:latin typeface="Be Vietnam Pro" pitchFamily="34" charset="0"/>
-                <a:ea typeface="Be Vietnam Pro" pitchFamily="34" charset="-122"/>
-                <a:cs typeface="Be Vietnam Pro" pitchFamily="34" charset="-120"/>
-              </a:rPr>
-              <a:t> Bài</a:t>
-            </a:r>
-            <a:r>
-              <a:rPr lang="en-US" sz="1650" dirty="0" spc="0" kern="0">
-                <a:solidFill>
-                  <a:srgbClr val="9A98A0"/>
-                </a:solidFill>
-                <a:latin typeface="Be Vietnam Pro" pitchFamily="34" charset="0"/>
-                <a:ea typeface="Be Vietnam Pro" pitchFamily="34" charset="-122"/>
-                <a:cs typeface="Be Vietnam Pro" pitchFamily="34" charset="-120"/>
-              </a:rPr>
-              <a:t> 18</a:t>
-            </a:r>
-            <a:r>
-              <a:rPr lang="en-US" sz="1650" dirty="0" spc="-1" kern="0">
-                <a:solidFill>
-                  <a:srgbClr val="9A98A0"/>
-                </a:solidFill>
-                <a:latin typeface="Be Vietnam Pro" pitchFamily="34" charset="0"/>
-                <a:ea typeface="Be Vietnam Pro" pitchFamily="34" charset="-122"/>
-                <a:cs typeface="Be Vietnam Pro" pitchFamily="34" charset="-120"/>
-              </a:rPr>
-              <a:t> ·</a:t>
-            </a:r>
-            <a:r>
-              <a:rPr lang="en-US" sz="1650" dirty="0" spc="2" kern="0">
-                <a:solidFill>
-                  <a:srgbClr val="9A98A0"/>
-                </a:solidFill>
-                <a:latin typeface="Be Vietnam Pro" pitchFamily="34" charset="0"/>
-                <a:ea typeface="Be Vietnam Pro" pitchFamily="34" charset="-122"/>
-                <a:cs typeface="Be Vietnam Pro" pitchFamily="34" charset="-120"/>
-              </a:rPr>
-              <a:t> 10/10</a:t>
             </a:r>
             <a:endParaRPr lang="en-US" sz="1650" dirty="0"/>
           </a:p>
@@ -5702,7 +6287,7 @@
       </p:sp>
       <p:sp>
         <p:nvSpPr>
-          <p:cNvPr id="41" name="Connector line-1792334746668-283038183"/>
+          <p:cNvPr id="51" name="Connector line-1792390660881-319011117"/>
           <p:cNvSpPr/>
           <p:nvPr/>
         </p:nvSpPr>
@@ -5729,7 +6314,7 @@
       </p:sp>
       <p:sp>
         <p:nvSpPr>
-          <p:cNvPr id="42" name="Shape 40"/>
+          <p:cNvPr id="52" name="Shape 50"/>
           <p:cNvSpPr/>
           <p:nvPr/>
         </p:nvSpPr>
@@ -5749,7 +6334,7 @@
       </p:sp>
       <p:sp>
         <p:nvSpPr>
-          <p:cNvPr id="43" name="Shape 41"/>
+          <p:cNvPr id="53" name="Shape 51"/>
           <p:cNvSpPr/>
           <p:nvPr/>
         </p:nvSpPr>
@@ -5769,7 +6354,7 @@
       </p:sp>
       <p:sp>
         <p:nvSpPr>
-          <p:cNvPr id="44" name="Shape 42"/>
+          <p:cNvPr id="54" name="Shape 52"/>
           <p:cNvSpPr/>
           <p:nvPr/>
         </p:nvSpPr>
@@ -5789,7 +6374,7 @@
       </p:sp>
       <p:sp>
         <p:nvSpPr>
-          <p:cNvPr id="45" name="Shape 43"/>
+          <p:cNvPr id="55" name="Shape 53"/>
           <p:cNvSpPr/>
           <p:nvPr/>
         </p:nvSpPr>
@@ -5809,7 +6394,7 @@
       </p:sp>
       <p:sp>
         <p:nvSpPr>
-          <p:cNvPr id="46" name="Shape 44"/>
+          <p:cNvPr id="56" name="Shape 54"/>
           <p:cNvSpPr/>
           <p:nvPr/>
         </p:nvSpPr>
@@ -5829,7 +6414,7 @@
       </p:sp>
       <p:sp>
         <p:nvSpPr>
-          <p:cNvPr id="47" name="Shape 45"/>
+          <p:cNvPr id="57" name="Shape 55"/>
           <p:cNvSpPr/>
           <p:nvPr/>
         </p:nvSpPr>
@@ -5849,7 +6434,7 @@
       </p:sp>
       <p:sp>
         <p:nvSpPr>
-          <p:cNvPr id="48" name="Shape 46"/>
+          <p:cNvPr id="58" name="Shape 56"/>
           <p:cNvSpPr/>
           <p:nvPr/>
         </p:nvSpPr>
@@ -5869,7 +6454,7 @@
       </p:sp>
       <p:sp>
         <p:nvSpPr>
-          <p:cNvPr id="49" name="Shape 47"/>
+          <p:cNvPr id="59" name="Shape 57"/>
           <p:cNvSpPr/>
           <p:nvPr/>
         </p:nvSpPr>
@@ -5889,7 +6474,7 @@
       </p:sp>
       <p:sp>
         <p:nvSpPr>
-          <p:cNvPr id="50" name="Shape 48"/>
+          <p:cNvPr id="60" name="Shape 58"/>
           <p:cNvSpPr/>
           <p:nvPr/>
         </p:nvSpPr>
@@ -5909,7 +6494,7 @@
       </p:sp>
       <p:sp>
         <p:nvSpPr>
-          <p:cNvPr id="51" name="Shape 49"/>
+          <p:cNvPr id="61" name="Shape 59"/>
           <p:cNvSpPr/>
           <p:nvPr/>
         </p:nvSpPr>
@@ -5929,7 +6514,123 @@
       </p:sp>
       <p:sp>
         <p:nvSpPr>
-          <p:cNvPr id="52" name="Shape 50"/>
+          <p:cNvPr id="62" name="Text 60"/>
+          <p:cNvSpPr/>
+          <p:nvPr/>
+        </p:nvSpPr>
+        <p:spPr>
+          <a:xfrm>
+            <a:off x="914400" y="9715500"/>
+            <a:ext cx="7620000" cy="285750"/>
+          </a:xfrm>
+          <a:prstGeom prst="rect">
+            <a:avLst/>
+          </a:prstGeom>
+          <a:noFill/>
+          <a:ln/>
+        </p:spPr>
+        <p:txBody>
+          <a:bodyPr wrap="square" lIns="0" tIns="0" rIns="0" bIns="0" rtlCol="0" anchor="t"/>
+          <a:lstStyle/>
+          <a:p>
+            <a:pPr algn="l" indent="0" marL="0">
+              <a:buNone/>
+            </a:pPr>
+            <a:r>
+              <a:rPr lang="en-US" sz="1650" dirty="0" spc="-12" kern="0">
+                <a:solidFill>
+                  <a:srgbClr val="9A98A0"/>
+                </a:solidFill>
+                <a:latin typeface="Be Vietnam Pro" pitchFamily="34" charset="0"/>
+                <a:ea typeface="Be Vietnam Pro" pitchFamily="34" charset="-122"/>
+                <a:cs typeface="Be Vietnam Pro" pitchFamily="34" charset="-120"/>
+              </a:rPr>
+              <a:t>System</a:t>
+            </a:r>
+            <a:r>
+              <a:rPr lang="en-US" sz="1650" dirty="0" spc="0" kern="0">
+                <a:solidFill>
+                  <a:srgbClr val="9A98A0"/>
+                </a:solidFill>
+                <a:latin typeface="Be Vietnam Pro" pitchFamily="34" charset="0"/>
+                <a:ea typeface="Be Vietnam Pro" pitchFamily="34" charset="-122"/>
+                <a:cs typeface="Be Vietnam Pro" pitchFamily="34" charset="-120"/>
+              </a:rPr>
+              <a:t> Design</a:t>
+            </a:r>
+            <a:r>
+              <a:rPr lang="en-US" sz="1650" dirty="0" spc="1" kern="0">
+                <a:solidFill>
+                  <a:srgbClr val="9A98A0"/>
+                </a:solidFill>
+                <a:latin typeface="Be Vietnam Pro" pitchFamily="34" charset="0"/>
+                <a:ea typeface="Be Vietnam Pro" pitchFamily="34" charset="-122"/>
+                <a:cs typeface="Be Vietnam Pro" pitchFamily="34" charset="-120"/>
+              </a:rPr>
+              <a:t> 101</a:t>
+            </a:r>
+            <a:r>
+              <a:rPr lang="en-US" sz="1650" dirty="0" spc="0" kern="0">
+                <a:solidFill>
+                  <a:srgbClr val="9A98A0"/>
+                </a:solidFill>
+                <a:latin typeface="Be Vietnam Pro" pitchFamily="34" charset="0"/>
+                <a:ea typeface="Be Vietnam Pro" pitchFamily="34" charset="-122"/>
+                <a:cs typeface="Be Vietnam Pro" pitchFamily="34" charset="-120"/>
+              </a:rPr>
+              <a:t> ·</a:t>
+            </a:r>
+            <a:r>
+              <a:rPr lang="en-US" sz="1650" dirty="0" spc="1" kern="0">
+                <a:solidFill>
+                  <a:srgbClr val="9A98A0"/>
+                </a:solidFill>
+                <a:latin typeface="Be Vietnam Pro" pitchFamily="34" charset="0"/>
+                <a:ea typeface="Be Vietnam Pro" pitchFamily="34" charset="-122"/>
+                <a:cs typeface="Be Vietnam Pro" pitchFamily="34" charset="-120"/>
+              </a:rPr>
+              <a:t> Bài</a:t>
+            </a:r>
+            <a:r>
+              <a:rPr lang="en-US" sz="1650" dirty="0" spc="0" kern="0">
+                <a:solidFill>
+                  <a:srgbClr val="9A98A0"/>
+                </a:solidFill>
+                <a:latin typeface="Be Vietnam Pro" pitchFamily="34" charset="0"/>
+                <a:ea typeface="Be Vietnam Pro" pitchFamily="34" charset="-122"/>
+                <a:cs typeface="Be Vietnam Pro" pitchFamily="34" charset="-120"/>
+              </a:rPr>
+              <a:t> 18</a:t>
+            </a:r>
+            <a:r>
+              <a:rPr lang="en-US" sz="1650" dirty="0" spc="-1" kern="0">
+                <a:solidFill>
+                  <a:srgbClr val="9A98A0"/>
+                </a:solidFill>
+                <a:latin typeface="Be Vietnam Pro" pitchFamily="34" charset="0"/>
+                <a:ea typeface="Be Vietnam Pro" pitchFamily="34" charset="-122"/>
+                <a:cs typeface="Be Vietnam Pro" pitchFamily="34" charset="-120"/>
+              </a:rPr>
+              <a:t> ·</a:t>
+            </a:r>
+            <a:r>
+              <a:rPr lang="en-US" sz="1650" dirty="0" spc="2" kern="0">
+                <a:solidFill>
+                  <a:srgbClr val="9A98A0"/>
+                </a:solidFill>
+                <a:latin typeface="Be Vietnam Pro" pitchFamily="34" charset="0"/>
+                <a:ea typeface="Be Vietnam Pro" pitchFamily="34" charset="-122"/>
+                <a:cs typeface="Be Vietnam Pro" pitchFamily="34" charset="-120"/>
+              </a:rPr>
+              <a:t> 10/10</a:t>
+            </a:r>
+            <a:endParaRPr lang="en-US" sz="1650" dirty="0"/>
+          </a:p>
+        </p:txBody>
+      </p:sp>
+      <p:sp>
+        <p:nvSpPr>
+          <p:cNvPr id="63" name="Shape 61"/>
           <p:cNvSpPr/>
           <p:nvPr/>
         </p:nvSpPr>
@@ -5953,7 +6654,7 @@
       </p:sp>
       <p:pic>
         <p:nvPicPr>
-          <p:cNvPr id="53" name="Moda image moda-export-watermark-caaf1e3e-d663-47e4-9a54-6b1f85b126ea" descr="">    </p:cNvPr>
+          <p:cNvPr id="64" name="Moda image moda-export-watermark-caaf1e3e-d663-47e4-9a54-6b1f85b126ea" descr="">    </p:cNvPr>
           <p:cNvPicPr>
             <a:picLocks noChangeAspect="1"/>
           </p:cNvPicPr>
